--- a/tutor-time/movement-and-mental-health/downloads/Movement_and_Mental_Health_Lesson_1.pptx
+++ b/tutor-time/movement-and-mental-health/downloads/Movement_and_Mental_Health_Lesson_1.pptx
@@ -3352,7 +3352,7 @@
                 </a:solidFill>
                 <a:latin typeface="Karla"/>
               </a:rPr>
-              <a:t>This is what, and how little it takes to change it.</a:t>
+              <a:t>Today: what it does, and how little it takes to change it.</a:t>
             </a:r>
           </a:p>
         </p:txBody>
@@ -4824,7 +4824,7 @@
                 </a:solidFill>
                 <a:latin typeface="Karla"/>
               </a:rPr>
-              <a:t>The movers' attention scores went up. The others' went slightly down.</a:t>
+              <a:t>The movers’ attention scores went up. The others’ went slightly down.</a:t>
             </a:r>
           </a:p>
         </p:txBody>
@@ -5218,7 +5218,7 @@
                 </a:solidFill>
                 <a:latin typeface="Karla"/>
               </a:rPr>
-              <a:t>One break at lunchtime showed up in the next lesson, in a test and in behaviour.</a:t>
+              <a:t>One active break showed up in the next lesson, in a test and in behaviour.</a:t>
             </a:r>
           </a:p>
         </p:txBody>
@@ -7880,7 +7880,7 @@
                 </a:solidFill>
                 <a:latin typeface="Karla"/>
               </a:rPr>
-              <a:t>If something is harder than that, tell someone.</a:t>
+              <a:t>If you are struggling with something bigger, tell someone.</a:t>
             </a:r>
           </a:p>
         </p:txBody>
@@ -8396,7 +8396,7 @@
                 </a:solidFill>
                 <a:latin typeface="Karla"/>
               </a:rPr>
-              <a:t>Two fingers on your wrist, below the thumb. Not the thumb itself, which has a pulse of its own. Count for fifteen seconds and multiply by four.</a:t>
+              <a:t>Two fingers on your wrist, below the thumb. Do not use your thumb: it has its own pulse. Count for fifteen seconds and multiply by four.</a:t>
             </a:r>
           </a:p>
         </p:txBody>
@@ -9348,7 +9348,7 @@
                 </a:solidFill>
                 <a:latin typeface="Karla"/>
               </a:rPr>
-              <a:t>Score your focus out of ten, using the scale on the last slide.</a:t>
+              <a:t>Score your focus out of ten, using the scale on the previous slide.</a:t>
             </a:r>
           </a:p>
         </p:txBody>
@@ -10994,7 +10994,7 @@
                 </a:solidFill>
                 <a:latin typeface="Karla"/>
               </a:rPr>
-              <a:t>Enough to notice your breathing is enough. Exhausting yourself is not the point.</a:t>
+              <a:t>Noticing your breathing is enough. Exhausting yourself is not the point.</a:t>
             </a:r>
           </a:p>
         </p:txBody>
@@ -12020,7 +12020,7 @@
                 </a:solidFill>
                 <a:latin typeface="Karla"/>
               </a:rPr>
-              <a:t>The quietest one. Every step has a seated version.</a:t>
+              <a:t>The quietest one. Slow stretches and breathing.</a:t>
             </a:r>
           </a:p>
         </p:txBody>
@@ -13460,7 +13460,7 @@
                 </a:solidFill>
                 <a:latin typeface="Karla"/>
               </a:rPr>
-              <a:t>Your mood and your focus, for the rest of the morning.</a:t>
+              <a:t>Your mood and your focus, for the next hour or so.</a:t>
             </a:r>
             <a:br/>
             <a:r>
@@ -14232,7 +14232,7 @@
                 </a:solidFill>
                 <a:latin typeface="Karla"/>
               </a:rPr>
-              <a:t>SLIDES 11 AND 12 OF THIS LESSON, AND LESSON TWO</a:t>
+              <a:t>SLIDES 10 AND 11 OF THIS LESSON, AND SLIDE 12 OF LESSON TWO</a:t>
             </a:r>
           </a:p>
         </p:txBody>
@@ -15636,7 +15636,7 @@
                 </a:solidFill>
                 <a:latin typeface="Karla"/>
               </a:rPr>
-              <a:t>In pairs. Best at the top. You have ten minutes and you want to feel awake at the end of it.</a:t>
+              <a:t>In pairs. Best at the top. Imagine you have ten minutes and want to feel awake at the end.</a:t>
             </a:r>
           </a:p>
         </p:txBody>
@@ -16120,7 +16120,7 @@
                 </a:solidFill>
                 <a:latin typeface="Libre Caslon Display"/>
               </a:rPr>
-              <a:t>end up somewhere very different by lunch.</a:t>
+              <a:t>leave you feeling very different by lunch.</a:t>
             </a:r>
           </a:p>
         </p:txBody>
@@ -16162,7 +16162,7 @@
                 </a:solidFill>
                 <a:latin typeface="Karla"/>
               </a:rPr>
-              <a:t>So why does the tiring one leave you with more?</a:t>
+              <a:t>So why does the tiring one leave you with more energy?</a:t>
             </a:r>
           </a:p>
         </p:txBody>
@@ -17300,7 +17300,7 @@
                 </a:solidFill>
                 <a:latin typeface="Karla"/>
               </a:rPr>
-              <a:t>Heart rate up, blood flow up, chemistry up. The lift arrives within minutes and fades over an hour or two, rather than switching off.</a:t>
+              <a:t>Heart rate up, blood flow up, chemistry up. The lift arrives within minutes and fades gradually over an hour or two.</a:t>
             </a:r>
           </a:p>
         </p:txBody>

--- a/tutor-time/movement-and-mental-health/downloads/Movement_and_Mental_Health_Lesson_1.pptx
+++ b/tutor-time/movement-and-mental-health/downloads/Movement_and_Mental_Health_Lesson_1.pptx
@@ -3212,7 +3212,7 @@
                 <a:solidFill>
                   <a:srgbClr val="502961"/>
                 </a:solidFill>
-                <a:latin typeface="Karla"/>
+                <a:latin typeface="Calibri"/>
               </a:rPr>
               <a:t>MOVEMENT AND MENTAL HEALTH  ·  LESSON 1 OF 3</a:t>
             </a:r>
@@ -3250,11 +3250,11 @@
               </a:spcAft>
             </a:pPr>
             <a:r>
-              <a:rPr sz="3400" b="1" i="0">
+              <a:rPr sz="3400" b="0" i="0">
                 <a:solidFill>
                   <a:srgbClr val="502961"/>
                 </a:solidFill>
-                <a:latin typeface="Libre Caslon Display"/>
+                <a:latin typeface="Georgia"/>
               </a:rPr>
               <a:t>What five minutes actually does</a:t>
             </a:r>
@@ -3340,7 +3340,7 @@
                 <a:solidFill>
                   <a:srgbClr val="635C6B"/>
                 </a:solidFill>
-                <a:latin typeface="Karla"/>
+                <a:latin typeface="Calibri"/>
               </a:rPr>
               <a:t>Sitting still all morning does something to how you feel.</a:t>
             </a:r>
@@ -3350,7 +3350,7 @@
                 <a:solidFill>
                   <a:srgbClr val="635C6B"/>
                 </a:solidFill>
-                <a:latin typeface="Karla"/>
+                <a:latin typeface="Calibri"/>
               </a:rPr>
               <a:t>Today: what it does, and how little it takes to change it.</a:t>
             </a:r>
@@ -3392,7 +3392,7 @@
                 <a:solidFill>
                   <a:srgbClr val="9C95A3"/>
                 </a:solidFill>
-                <a:latin typeface="Karla"/>
+                <a:latin typeface="Calibri"/>
               </a:rPr>
               <a:t>Healthy Body, Healthy Mind</a:t>
             </a:r>
@@ -3458,7 +3458,7 @@
                 <a:solidFill>
                   <a:srgbClr val="9C95A3"/>
                 </a:solidFill>
-                <a:latin typeface="Karla"/>
+                <a:latin typeface="Calibri"/>
               </a:rPr>
               <a:t>The Pastoral Guide</a:t>
             </a:r>
@@ -3500,7 +3500,7 @@
                 <a:solidFill>
                   <a:srgbClr val="9C95A3"/>
                 </a:solidFill>
-                <a:latin typeface="Karla"/>
+                <a:latin typeface="Calibri"/>
               </a:rPr>
               <a:t>1 / 22</a:t>
             </a:r>
@@ -3604,97 +3604,9 @@
                 <a:solidFill>
                   <a:srgbClr val="D8BCE4"/>
                 </a:solidFill>
-                <a:latin typeface="Karla"/>
+                <a:latin typeface="Calibri"/>
               </a:rPr>
               <a:t>BEFORE YOU SEE THE ANSWER</a:t>
-            </a:r>
-          </a:p>
-        </p:txBody>
-      </p:sp>
-      <p:sp>
-        <p:nvSpPr>
-          <p:cNvPr id="4" name="Rounded Rectangle 3"/>
-          <p:cNvSpPr/>
-          <p:nvPr/>
-        </p:nvSpPr>
-        <p:spPr>
-          <a:xfrm>
-            <a:off x="6995160" y="530352"/>
-            <a:ext cx="1463040" cy="347472"/>
-          </a:xfrm>
-          <a:prstGeom prst="roundRect">
-            <a:avLst>
-              <a:gd name="adj" fmla="val 50000"/>
-            </a:avLst>
-          </a:prstGeom>
-          <a:solidFill>
-            <a:srgbClr val="FFFDF7"/>
-          </a:solidFill>
-          <a:ln>
-            <a:noFill/>
-          </a:ln>
-          <a:effectLst/>
-        </p:spPr>
-        <p:style>
-          <a:lnRef idx="1">
-            <a:schemeClr val="accent1"/>
-          </a:lnRef>
-          <a:fillRef idx="3">
-            <a:schemeClr val="accent1"/>
-          </a:fillRef>
-          <a:effectRef idx="2">
-            <a:schemeClr val="accent1"/>
-          </a:effectRef>
-          <a:fontRef idx="minor">
-            <a:schemeClr val="lt1"/>
-          </a:fontRef>
-        </p:style>
-        <p:txBody>
-          <a:bodyPr rtlCol="0" anchor="ctr"/>
-          <a:lstStyle/>
-          <a:p>
-            <a:pPr algn="ctr"/>
-          </a:p>
-        </p:txBody>
-      </p:sp>
-      <p:sp>
-        <p:nvSpPr>
-          <p:cNvPr id="5" name="TextBox 4"/>
-          <p:cNvSpPr txBox="1"/>
-          <p:nvPr/>
-        </p:nvSpPr>
-        <p:spPr>
-          <a:xfrm>
-            <a:off x="6995160" y="589788"/>
-            <a:ext cx="1463040" cy="237744"/>
-          </a:xfrm>
-          <a:prstGeom prst="rect">
-            <a:avLst/>
-          </a:prstGeom>
-          <a:noFill/>
-        </p:spPr>
-        <p:txBody>
-          <a:bodyPr wrap="square" lIns="0" rIns="0" tIns="0" bIns="0" anchor="t">
-            <a:spAutoFit/>
-          </a:bodyPr>
-          <a:lstStyle/>
-          <a:p>
-            <a:pPr algn="ctr">
-              <a:lnSpc>
-                <a:spcPct val="125000"/>
-              </a:lnSpc>
-              <a:spcAft>
-                <a:spcPts val="0"/>
-              </a:spcAft>
-            </a:pPr>
-            <a:r>
-              <a:rPr sz="1000" b="1" i="0" spc="100">
-                <a:solidFill>
-                  <a:srgbClr val="502961"/>
-                </a:solidFill>
-                <a:latin typeface="Karla"/>
-              </a:rPr>
-              <a:t>PREDICT IT</a:t>
             </a:r>
           </a:p>
         </p:txBody>
@@ -3730,11 +3642,11 @@
               </a:spcAft>
             </a:pPr>
             <a:r>
-              <a:rPr sz="3200" b="1" i="0">
+              <a:rPr sz="3200" b="0" i="0">
                 <a:solidFill>
                   <a:srgbClr val="FFFDF7"/>
                 </a:solidFill>
-                <a:latin typeface="Libre Caslon Display"/>
+                <a:latin typeface="Georgia"/>
               </a:rPr>
               <a:t>Be the researcher</a:t>
             </a:r>
@@ -3776,7 +3688,7 @@
                 <a:solidFill>
                   <a:srgbClr val="D8BCE4"/>
                 </a:solidFill>
-                <a:latin typeface="Karla"/>
+                <a:latin typeface="Calibri"/>
               </a:rPr>
               <a:t>A real study, run on 168 students your age. You get the set-up. You do not get the result.</a:t>
             </a:r>
@@ -3862,11 +3774,11 @@
               </a:spcAft>
             </a:pPr>
             <a:r>
-              <a:rPr sz="1250" b="1" i="0">
+              <a:rPr sz="1250" b="0" i="0">
                 <a:solidFill>
                   <a:srgbClr val="502961"/>
                 </a:solidFill>
-                <a:latin typeface="Libre Caslon Display"/>
+                <a:latin typeface="Georgia"/>
               </a:rPr>
               <a:t>Half of them</a:t>
             </a:r>
@@ -3908,7 +3820,7 @@
                 <a:solidFill>
                   <a:srgbClr val="635C6B"/>
                 </a:solidFill>
-                <a:latin typeface="Karla"/>
+                <a:latin typeface="Calibri"/>
               </a:rPr>
               <a:t>Twenty minutes of moving at break. Games, running, skipping.</a:t>
             </a:r>
@@ -3994,11 +3906,11 @@
               </a:spcAft>
             </a:pPr>
             <a:r>
-              <a:rPr sz="1250" b="1" i="0">
+              <a:rPr sz="1250" b="0" i="0">
                 <a:solidFill>
                   <a:srgbClr val="502961"/>
                 </a:solidFill>
-                <a:latin typeface="Libre Caslon Display"/>
+                <a:latin typeface="Georgia"/>
               </a:rPr>
               <a:t>The other half</a:t>
             </a:r>
@@ -4040,7 +3952,7 @@
                 <a:solidFill>
                   <a:srgbClr val="635C6B"/>
                 </a:solidFill>
-                <a:latin typeface="Karla"/>
+                <a:latin typeface="Calibri"/>
               </a:rPr>
               <a:t>Break as normal. Sitting, talking, nothing physical.</a:t>
             </a:r>
@@ -4126,11 +4038,11 @@
               </a:spcAft>
             </a:pPr>
             <a:r>
-              <a:rPr sz="1250" b="1" i="0">
+              <a:rPr sz="1250" b="0" i="0">
                 <a:solidFill>
                   <a:srgbClr val="502961"/>
                 </a:solidFill>
-                <a:latin typeface="Libre Caslon Display"/>
+                <a:latin typeface="Georgia"/>
               </a:rPr>
               <a:t>Then, both halves</a:t>
             </a:r>
@@ -4172,7 +4084,7 @@
                 <a:solidFill>
                   <a:srgbClr val="635C6B"/>
                 </a:solidFill>
-                <a:latin typeface="Karla"/>
+                <a:latin typeface="Calibri"/>
               </a:rPr>
               <a:t>The same attention test, and a maths lesson watched by a researcher.</a:t>
             </a:r>
@@ -4214,7 +4126,7 @@
                 <a:solidFill>
                   <a:srgbClr val="FFFDF7"/>
                 </a:solidFill>
-                <a:latin typeface="Karla"/>
+                <a:latin typeface="Calibri"/>
               </a:rPr>
               <a:t>In pairs. Who scored better on attention, and by how much?</a:t>
             </a:r>
@@ -4280,7 +4192,7 @@
                 <a:solidFill>
                   <a:srgbClr val="D8BCE4"/>
                 </a:solidFill>
-                <a:latin typeface="Karla"/>
+                <a:latin typeface="Calibri"/>
               </a:rPr>
               <a:t>The Pastoral Guide</a:t>
             </a:r>
@@ -4322,7 +4234,7 @@
                 <a:solidFill>
                   <a:srgbClr val="D8BCE4"/>
                 </a:solidFill>
-                <a:latin typeface="Karla"/>
+                <a:latin typeface="Calibri"/>
               </a:rPr>
               <a:t>10 / 22</a:t>
             </a:r>
@@ -4426,97 +4338,9 @@
                 <a:solidFill>
                   <a:srgbClr val="502961"/>
                 </a:solidFill>
-                <a:latin typeface="Karla"/>
+                <a:latin typeface="Calibri"/>
               </a:rPr>
               <a:t>NOW THE ANSWER</a:t>
-            </a:r>
-          </a:p>
-        </p:txBody>
-      </p:sp>
-      <p:sp>
-        <p:nvSpPr>
-          <p:cNvPr id="4" name="Rounded Rectangle 3"/>
-          <p:cNvSpPr/>
-          <p:nvPr/>
-        </p:nvSpPr>
-        <p:spPr>
-          <a:xfrm>
-            <a:off x="7050024" y="530352"/>
-            <a:ext cx="1408176" cy="347472"/>
-          </a:xfrm>
-          <a:prstGeom prst="roundRect">
-            <a:avLst>
-              <a:gd name="adj" fmla="val 50000"/>
-            </a:avLst>
-          </a:prstGeom>
-          <a:solidFill>
-            <a:srgbClr val="F0E4F5"/>
-          </a:solidFill>
-          <a:ln>
-            <a:noFill/>
-          </a:ln>
-          <a:effectLst/>
-        </p:spPr>
-        <p:style>
-          <a:lnRef idx="1">
-            <a:schemeClr val="accent1"/>
-          </a:lnRef>
-          <a:fillRef idx="3">
-            <a:schemeClr val="accent1"/>
-          </a:fillRef>
-          <a:effectRef idx="2">
-            <a:schemeClr val="accent1"/>
-          </a:effectRef>
-          <a:fontRef idx="minor">
-            <a:schemeClr val="lt1"/>
-          </a:fontRef>
-        </p:style>
-        <p:txBody>
-          <a:bodyPr rtlCol="0" anchor="ctr"/>
-          <a:lstStyle/>
-          <a:p>
-            <a:pPr algn="ctr"/>
-          </a:p>
-        </p:txBody>
-      </p:sp>
-      <p:sp>
-        <p:nvSpPr>
-          <p:cNvPr id="5" name="TextBox 4"/>
-          <p:cNvSpPr txBox="1"/>
-          <p:nvPr/>
-        </p:nvSpPr>
-        <p:spPr>
-          <a:xfrm>
-            <a:off x="7050024" y="589788"/>
-            <a:ext cx="1408176" cy="237744"/>
-          </a:xfrm>
-          <a:prstGeom prst="rect">
-            <a:avLst/>
-          </a:prstGeom>
-          <a:noFill/>
-        </p:spPr>
-        <p:txBody>
-          <a:bodyPr wrap="square" lIns="0" rIns="0" tIns="0" bIns="0" anchor="t">
-            <a:spAutoFit/>
-          </a:bodyPr>
-          <a:lstStyle/>
-          <a:p>
-            <a:pPr algn="ctr">
-              <a:lnSpc>
-                <a:spcPct val="125000"/>
-              </a:lnSpc>
-              <a:spcAft>
-                <a:spcPts val="0"/>
-              </a:spcAft>
-            </a:pPr>
-            <a:r>
-              <a:rPr sz="1000" b="1" i="0" spc="100">
-                <a:solidFill>
-                  <a:srgbClr val="502961"/>
-                </a:solidFill>
-                <a:latin typeface="Karla"/>
-              </a:rPr>
-              <a:t>RESEARCH</a:t>
             </a:r>
           </a:p>
         </p:txBody>
@@ -4552,11 +4376,11 @@
               </a:spcAft>
             </a:pPr>
             <a:r>
-              <a:rPr sz="3000" b="1" i="0">
+              <a:rPr sz="3000" b="0" i="0">
                 <a:solidFill>
                   <a:srgbClr val="2F2A36"/>
                 </a:solidFill>
-                <a:latin typeface="Libre Caslon Display"/>
+                <a:latin typeface="Georgia"/>
               </a:rPr>
               <a:t>What actually happened</a:t>
             </a:r>
@@ -4646,7 +4470,7 @@
                 <a:solidFill>
                   <a:srgbClr val="502961"/>
                 </a:solidFill>
-                <a:latin typeface="Karla"/>
+                <a:latin typeface="Calibri"/>
               </a:rPr>
               <a:t>168 students aged 12 to 15. Half moved for twenty minutes at break, half did not.</a:t>
             </a:r>
@@ -4776,11 +4600,11 @@
               </a:spcAft>
             </a:pPr>
             <a:r>
-              <a:rPr sz="1150" b="1" i="0">
+              <a:rPr sz="1150" b="0" i="0">
                 <a:solidFill>
                   <a:srgbClr val="FFFDF7"/>
                 </a:solidFill>
-                <a:latin typeface="Libre Caslon Display"/>
+                <a:latin typeface="Georgia"/>
               </a:rPr>
               <a:t>1</a:t>
             </a:r>
@@ -4822,7 +4646,7 @@
                 <a:solidFill>
                   <a:srgbClr val="2F2A36"/>
                 </a:solidFill>
-                <a:latin typeface="Karla"/>
+                <a:latin typeface="Calibri"/>
               </a:rPr>
               <a:t>The movers’ attention scores went up. The others’ went slightly down.</a:t>
             </a:r>
@@ -4952,11 +4776,11 @@
               </a:spcAft>
             </a:pPr>
             <a:r>
-              <a:rPr sz="1150" b="1" i="0">
+              <a:rPr sz="1150" b="0" i="0">
                 <a:solidFill>
                   <a:srgbClr val="FFFDF7"/>
                 </a:solidFill>
-                <a:latin typeface="Libre Caslon Display"/>
+                <a:latin typeface="Georgia"/>
               </a:rPr>
               <a:t>2</a:t>
             </a:r>
@@ -4998,7 +4822,7 @@
                 <a:solidFill>
                   <a:srgbClr val="2F2A36"/>
                 </a:solidFill>
-                <a:latin typeface="Karla"/>
+                <a:latin typeface="Calibri"/>
               </a:rPr>
               <a:t>The gap was large enough that it is very unlikely to be chance.</a:t>
             </a:r>
@@ -5128,11 +4952,11 @@
               </a:spcAft>
             </a:pPr>
             <a:r>
-              <a:rPr sz="1150" b="1" i="0">
+              <a:rPr sz="1150" b="0" i="0">
                 <a:solidFill>
                   <a:srgbClr val="FFFDF7"/>
                 </a:solidFill>
-                <a:latin typeface="Libre Caslon Display"/>
+                <a:latin typeface="Georgia"/>
               </a:rPr>
               <a:t>3</a:t>
             </a:r>
@@ -5174,7 +4998,7 @@
                 <a:solidFill>
                   <a:srgbClr val="2F2A36"/>
                 </a:solidFill>
-                <a:latin typeface="Karla"/>
+                <a:latin typeface="Calibri"/>
               </a:rPr>
               <a:t>Researchers then watched a maths lesson. The movers spent more of it on task.</a:t>
             </a:r>
@@ -5216,7 +5040,7 @@
                 <a:solidFill>
                   <a:srgbClr val="502961"/>
                 </a:solidFill>
-                <a:latin typeface="Karla"/>
+                <a:latin typeface="Calibri"/>
               </a:rPr>
               <a:t>One active break showed up in the next lesson, in a test and in behaviour.</a:t>
             </a:r>
@@ -5258,7 +5082,7 @@
                 <a:solidFill>
                   <a:srgbClr val="9C95A3"/>
                 </a:solidFill>
-                <a:latin typeface="Karla"/>
+                <a:latin typeface="Calibri"/>
               </a:rPr>
               <a:t>Xiao, X. (2026). Frontiers in Psychology, 17, 1781997.</a:t>
             </a:r>
@@ -5324,7 +5148,7 @@
                 <a:solidFill>
                   <a:srgbClr val="9C95A3"/>
                 </a:solidFill>
-                <a:latin typeface="Karla"/>
+                <a:latin typeface="Calibri"/>
               </a:rPr>
               <a:t>The Pastoral Guide</a:t>
             </a:r>
@@ -5366,7 +5190,7 @@
                 <a:solidFill>
                   <a:srgbClr val="9C95A3"/>
                 </a:solidFill>
-                <a:latin typeface="Karla"/>
+                <a:latin typeface="Calibri"/>
               </a:rPr>
               <a:t>11 / 22</a:t>
             </a:r>
@@ -5470,97 +5294,9 @@
                 <a:solidFill>
                   <a:srgbClr val="502961"/>
                 </a:solidFill>
-                <a:latin typeface="Karla"/>
+                <a:latin typeface="Calibri"/>
               </a:rPr>
               <a:t>THE QUESTION EVERYBODY ASKS</a:t>
-            </a:r>
-          </a:p>
-        </p:txBody>
-      </p:sp>
-      <p:sp>
-        <p:nvSpPr>
-          <p:cNvPr id="4" name="Rounded Rectangle 3"/>
-          <p:cNvSpPr/>
-          <p:nvPr/>
-        </p:nvSpPr>
-        <p:spPr>
-          <a:xfrm>
-            <a:off x="7050024" y="530352"/>
-            <a:ext cx="1408176" cy="347472"/>
-          </a:xfrm>
-          <a:prstGeom prst="roundRect">
-            <a:avLst>
-              <a:gd name="adj" fmla="val 50000"/>
-            </a:avLst>
-          </a:prstGeom>
-          <a:solidFill>
-            <a:srgbClr val="F0E4F5"/>
-          </a:solidFill>
-          <a:ln>
-            <a:noFill/>
-          </a:ln>
-          <a:effectLst/>
-        </p:spPr>
-        <p:style>
-          <a:lnRef idx="1">
-            <a:schemeClr val="accent1"/>
-          </a:lnRef>
-          <a:fillRef idx="3">
-            <a:schemeClr val="accent1"/>
-          </a:fillRef>
-          <a:effectRef idx="2">
-            <a:schemeClr val="accent1"/>
-          </a:effectRef>
-          <a:fontRef idx="minor">
-            <a:schemeClr val="lt1"/>
-          </a:fontRef>
-        </p:style>
-        <p:txBody>
-          <a:bodyPr rtlCol="0" anchor="ctr"/>
-          <a:lstStyle/>
-          <a:p>
-            <a:pPr algn="ctr"/>
-          </a:p>
-        </p:txBody>
-      </p:sp>
-      <p:sp>
-        <p:nvSpPr>
-          <p:cNvPr id="5" name="TextBox 4"/>
-          <p:cNvSpPr txBox="1"/>
-          <p:nvPr/>
-        </p:nvSpPr>
-        <p:spPr>
-          <a:xfrm>
-            <a:off x="7050024" y="589788"/>
-            <a:ext cx="1408176" cy="237744"/>
-          </a:xfrm>
-          <a:prstGeom prst="rect">
-            <a:avLst/>
-          </a:prstGeom>
-          <a:noFill/>
-        </p:spPr>
-        <p:txBody>
-          <a:bodyPr wrap="square" lIns="0" rIns="0" tIns="0" bIns="0" anchor="t">
-            <a:spAutoFit/>
-          </a:bodyPr>
-          <a:lstStyle/>
-          <a:p>
-            <a:pPr algn="ctr">
-              <a:lnSpc>
-                <a:spcPct val="125000"/>
-              </a:lnSpc>
-              <a:spcAft>
-                <a:spcPts val="0"/>
-              </a:spcAft>
-            </a:pPr>
-            <a:r>
-              <a:rPr sz="1000" b="1" i="0" spc="100">
-                <a:solidFill>
-                  <a:srgbClr val="502961"/>
-                </a:solidFill>
-                <a:latin typeface="Karla"/>
-              </a:rPr>
-              <a:t>RESEARCH</a:t>
             </a:r>
           </a:p>
         </p:txBody>
@@ -5596,11 +5332,11 @@
               </a:spcAft>
             </a:pPr>
             <a:r>
-              <a:rPr sz="3000" b="1" i="0">
+              <a:rPr sz="3000" b="0" i="0">
                 <a:solidFill>
                   <a:srgbClr val="2F2A36"/>
                 </a:solidFill>
-                <a:latin typeface="Libre Caslon Display"/>
+                <a:latin typeface="Georgia"/>
               </a:rPr>
               <a:t>How long does it last?</a:t>
             </a:r>
@@ -5690,7 +5426,7 @@
                 <a:solidFill>
                   <a:srgbClr val="502961"/>
                 </a:solidFill>
-                <a:latin typeface="Karla"/>
+                <a:latin typeface="Calibri"/>
               </a:rPr>
               <a:t>40 children. Twenty minutes of exercise one day, twenty of sitting reading another.</a:t>
             </a:r>
@@ -5820,11 +5556,11 @@
               </a:spcAft>
             </a:pPr>
             <a:r>
-              <a:rPr sz="1150" b="1" i="0">
+              <a:rPr sz="1150" b="0" i="0">
                 <a:solidFill>
                   <a:srgbClr val="FFFDF7"/>
                 </a:solidFill>
-                <a:latin typeface="Libre Caslon Display"/>
+                <a:latin typeface="Georgia"/>
               </a:rPr>
               <a:t>1</a:t>
             </a:r>
@@ -5866,7 +5602,7 @@
                 <a:solidFill>
                   <a:srgbClr val="2F2A36"/>
                 </a:solidFill>
-                <a:latin typeface="Karla"/>
+                <a:latin typeface="Calibri"/>
               </a:rPr>
               <a:t>Attention was tested up to twenty-seven minutes after they stopped. Still better.</a:t>
             </a:r>
@@ -5996,11 +5732,11 @@
               </a:spcAft>
             </a:pPr>
             <a:r>
-              <a:rPr sz="1150" b="1" i="0">
+              <a:rPr sz="1150" b="0" i="0">
                 <a:solidFill>
                   <a:srgbClr val="FFFDF7"/>
                 </a:solidFill>
-                <a:latin typeface="Libre Caslon Display"/>
+                <a:latin typeface="Georgia"/>
               </a:rPr>
               <a:t>2</a:t>
             </a:r>
@@ -6042,7 +5778,7 @@
                 <a:solidFill>
                   <a:srgbClr val="2F2A36"/>
                 </a:solidFill>
-                <a:latin typeface="Karla"/>
+                <a:latin typeface="Calibri"/>
               </a:rPr>
               <a:t>Reading and maths were tested about thirty-eight minutes after. Both were still better.</a:t>
             </a:r>
@@ -6172,11 +5908,11 @@
               </a:spcAft>
             </a:pPr>
             <a:r>
-              <a:rPr sz="1150" b="1" i="0">
+              <a:rPr sz="1150" b="0" i="0">
                 <a:solidFill>
                   <a:srgbClr val="FFFDF7"/>
                 </a:solidFill>
-                <a:latin typeface="Libre Caslon Display"/>
+                <a:latin typeface="Georgia"/>
               </a:rPr>
               <a:t>3</a:t>
             </a:r>
@@ -6218,7 +5954,7 @@
                 <a:solidFill>
                   <a:srgbClr val="2F2A36"/>
                 </a:solidFill>
-                <a:latin typeface="Karla"/>
+                <a:latin typeface="Calibri"/>
               </a:rPr>
               <a:t>The same pattern showed in a brain recording taken during the attention test.</a:t>
             </a:r>
@@ -6260,7 +5996,7 @@
                 <a:solidFill>
                   <a:srgbClr val="502961"/>
                 </a:solidFill>
-                <a:latin typeface="Karla"/>
+                <a:latin typeface="Calibri"/>
               </a:rPr>
               <a:t>It does not vanish when your heart rate drops, and that is the part you will measure.</a:t>
             </a:r>
@@ -6302,7 +6038,7 @@
                 <a:solidFill>
                   <a:srgbClr val="9C95A3"/>
                 </a:solidFill>
-                <a:latin typeface="Karla"/>
+                <a:latin typeface="Calibri"/>
               </a:rPr>
               <a:t>Pontifex, M. B., Saliba, B. J., Raine, L. B., Picchietti, D. L. &amp; Hillman, C. H. (2013). The Journal of Pediatrics, 162(3), 543–551.</a:t>
             </a:r>
@@ -6368,7 +6104,7 @@
                 <a:solidFill>
                   <a:srgbClr val="9C95A3"/>
                 </a:solidFill>
-                <a:latin typeface="Karla"/>
+                <a:latin typeface="Calibri"/>
               </a:rPr>
               <a:t>The Pastoral Guide</a:t>
             </a:r>
@@ -6410,7 +6146,7 @@
                 <a:solidFill>
                   <a:srgbClr val="9C95A3"/>
                 </a:solidFill>
-                <a:latin typeface="Karla"/>
+                <a:latin typeface="Calibri"/>
               </a:rPr>
               <a:t>12 / 22</a:t>
             </a:r>
@@ -6514,97 +6250,9 @@
                 <a:solidFill>
                   <a:srgbClr val="502961"/>
                 </a:solidFill>
-                <a:latin typeface="Karla"/>
+                <a:latin typeface="Calibri"/>
               </a:rPr>
               <a:t>BEING HONEST ABOUT IT</a:t>
-            </a:r>
-          </a:p>
-        </p:txBody>
-      </p:sp>
-      <p:sp>
-        <p:nvSpPr>
-          <p:cNvPr id="4" name="Rounded Rectangle 3"/>
-          <p:cNvSpPr/>
-          <p:nvPr/>
-        </p:nvSpPr>
-        <p:spPr>
-          <a:xfrm>
-            <a:off x="7086600" y="530352"/>
-            <a:ext cx="1371600" cy="347472"/>
-          </a:xfrm>
-          <a:prstGeom prst="roundRect">
-            <a:avLst>
-              <a:gd name="adj" fmla="val 50000"/>
-            </a:avLst>
-          </a:prstGeom>
-          <a:solidFill>
-            <a:srgbClr val="F0E4F5"/>
-          </a:solidFill>
-          <a:ln>
-            <a:noFill/>
-          </a:ln>
-          <a:effectLst/>
-        </p:spPr>
-        <p:style>
-          <a:lnRef idx="1">
-            <a:schemeClr val="accent1"/>
-          </a:lnRef>
-          <a:fillRef idx="3">
-            <a:schemeClr val="accent1"/>
-          </a:fillRef>
-          <a:effectRef idx="2">
-            <a:schemeClr val="accent1"/>
-          </a:effectRef>
-          <a:fontRef idx="minor">
-            <a:schemeClr val="lt1"/>
-          </a:fontRef>
-        </p:style>
-        <p:txBody>
-          <a:bodyPr rtlCol="0" anchor="ctr"/>
-          <a:lstStyle/>
-          <a:p>
-            <a:pPr algn="ctr"/>
-          </a:p>
-        </p:txBody>
-      </p:sp>
-      <p:sp>
-        <p:nvSpPr>
-          <p:cNvPr id="5" name="TextBox 4"/>
-          <p:cNvSpPr txBox="1"/>
-          <p:nvPr/>
-        </p:nvSpPr>
-        <p:spPr>
-          <a:xfrm>
-            <a:off x="7086600" y="589788"/>
-            <a:ext cx="1371600" cy="237744"/>
-          </a:xfrm>
-          <a:prstGeom prst="rect">
-            <a:avLst/>
-          </a:prstGeom>
-          <a:noFill/>
-        </p:spPr>
-        <p:txBody>
-          <a:bodyPr wrap="square" lIns="0" rIns="0" tIns="0" bIns="0" anchor="t">
-            <a:spAutoFit/>
-          </a:bodyPr>
-          <a:lstStyle/>
-          <a:p>
-            <a:pPr algn="ctr">
-              <a:lnSpc>
-                <a:spcPct val="125000"/>
-              </a:lnSpc>
-              <a:spcAft>
-                <a:spcPts val="0"/>
-              </a:spcAft>
-            </a:pPr>
-            <a:r>
-              <a:rPr sz="1000" b="1" i="0" spc="100">
-                <a:solidFill>
-                  <a:srgbClr val="502961"/>
-                </a:solidFill>
-                <a:latin typeface="Karla"/>
-              </a:rPr>
-              <a:t>DISCUSS</a:t>
             </a:r>
           </a:p>
         </p:txBody>
@@ -6640,11 +6288,11 @@
               </a:spcAft>
             </a:pPr>
             <a:r>
-              <a:rPr sz="3100" b="1" i="0">
+              <a:rPr sz="3100" b="0" i="0">
                 <a:solidFill>
                   <a:srgbClr val="2F2A36"/>
                 </a:solidFill>
-                <a:latin typeface="Libre Caslon Display"/>
+                <a:latin typeface="Georgia"/>
               </a:rPr>
               <a:t>Where it is mixed</a:t>
             </a:r>
@@ -6734,7 +6382,7 @@
                 <a:solidFill>
                   <a:srgbClr val="502961"/>
                 </a:solidFill>
-                <a:latin typeface="Karla"/>
+                <a:latin typeface="Calibri"/>
               </a:rPr>
               <a:t>A review of 22 studies of movement breaks, covering 3,615 students aged 5 to 18.</a:t>
             </a:r>
@@ -6820,11 +6468,11 @@
               </a:spcAft>
             </a:pPr>
             <a:r>
-              <a:rPr sz="1200" b="1" i="0">
+              <a:rPr sz="1200" b="0" i="0">
                 <a:solidFill>
                   <a:srgbClr val="502961"/>
                 </a:solidFill>
-                <a:latin typeface="Libre Caslon Display"/>
+                <a:latin typeface="Georgia"/>
               </a:rPr>
               <a:t>Behaviour in class</a:t>
             </a:r>
@@ -6866,7 +6514,7 @@
                 <a:solidFill>
                   <a:srgbClr val="635C6B"/>
                 </a:solidFill>
-                <a:latin typeface="Karla"/>
+                <a:latin typeface="Calibri"/>
               </a:rPr>
               <a:t>Six studies out of seven found it better after a movement break.</a:t>
             </a:r>
@@ -6952,11 +6600,11 @@
               </a:spcAft>
             </a:pPr>
             <a:r>
-              <a:rPr sz="1200" b="1" i="0">
+              <a:rPr sz="1200" b="0" i="0">
                 <a:solidFill>
                   <a:srgbClr val="502961"/>
                 </a:solidFill>
-                <a:latin typeface="Libre Caslon Display"/>
+                <a:latin typeface="Georgia"/>
               </a:rPr>
               <a:t>Attention and memory</a:t>
             </a:r>
@@ -6998,7 +6646,7 @@
                 <a:solidFill>
                   <a:srgbClr val="635C6B"/>
                 </a:solidFill>
-                <a:latin typeface="Karla"/>
+                <a:latin typeface="Calibri"/>
               </a:rPr>
               <a:t>Four studies found an improvement. Four found nothing at all.</a:t>
             </a:r>
@@ -7084,11 +6732,11 @@
               </a:spcAft>
             </a:pPr>
             <a:r>
-              <a:rPr sz="1200" b="1" i="0">
+              <a:rPr sz="1200" b="0" i="0">
                 <a:solidFill>
                   <a:srgbClr val="502961"/>
                 </a:solidFill>
-                <a:latin typeface="Libre Caslon Display"/>
+                <a:latin typeface="Georgia"/>
               </a:rPr>
               <a:t>What the reviewers said</a:t>
             </a:r>
@@ -7130,7 +6778,7 @@
                 <a:solidFill>
                   <a:srgbClr val="635C6B"/>
                 </a:solidFill>
-                <a:latin typeface="Karla"/>
+                <a:latin typeface="Calibri"/>
               </a:rPr>
               <a:t>Harder movement worked better than gentle movement.</a:t>
             </a:r>
@@ -7172,7 +6820,7 @@
                 <a:solidFill>
                   <a:srgbClr val="502961"/>
                 </a:solidFill>
-                <a:latin typeface="Karla"/>
+                <a:latin typeface="Calibri"/>
               </a:rPr>
               <a:t>So: if half the studies found nothing, why is anybody still recommending it?</a:t>
             </a:r>
@@ -7214,7 +6862,7 @@
                 <a:solidFill>
                   <a:srgbClr val="9C95A3"/>
                 </a:solidFill>
-                <a:latin typeface="Karla"/>
+                <a:latin typeface="Calibri"/>
               </a:rPr>
               <a:t>Reyes-Amigo, T. et al. (2025). Frontiers in Public Health, 13, 1469998.</a:t>
             </a:r>
@@ -7280,7 +6928,7 @@
                 <a:solidFill>
                   <a:srgbClr val="9C95A3"/>
                 </a:solidFill>
-                <a:latin typeface="Karla"/>
+                <a:latin typeface="Calibri"/>
               </a:rPr>
               <a:t>The Pastoral Guide</a:t>
             </a:r>
@@ -7322,7 +6970,7 @@
                 <a:solidFill>
                   <a:srgbClr val="9C95A3"/>
                 </a:solidFill>
-                <a:latin typeface="Karla"/>
+                <a:latin typeface="Calibri"/>
               </a:rPr>
               <a:t>13 / 22</a:t>
             </a:r>
@@ -7426,97 +7074,9 @@
                 <a:solidFill>
                   <a:srgbClr val="D8BCE4"/>
                 </a:solidFill>
-                <a:latin typeface="Karla"/>
+                <a:latin typeface="Calibri"/>
               </a:rPr>
               <a:t>TO BE CLEAR</a:t>
-            </a:r>
-          </a:p>
-        </p:txBody>
-      </p:sp>
-      <p:sp>
-        <p:nvSpPr>
-          <p:cNvPr id="4" name="Rounded Rectangle 3"/>
-          <p:cNvSpPr/>
-          <p:nvPr/>
-        </p:nvSpPr>
-        <p:spPr>
-          <a:xfrm>
-            <a:off x="7086600" y="530352"/>
-            <a:ext cx="1371600" cy="347472"/>
-          </a:xfrm>
-          <a:prstGeom prst="roundRect">
-            <a:avLst>
-              <a:gd name="adj" fmla="val 50000"/>
-            </a:avLst>
-          </a:prstGeom>
-          <a:solidFill>
-            <a:srgbClr val="FFFDF7"/>
-          </a:solidFill>
-          <a:ln>
-            <a:noFill/>
-          </a:ln>
-          <a:effectLst/>
-        </p:spPr>
-        <p:style>
-          <a:lnRef idx="1">
-            <a:schemeClr val="accent1"/>
-          </a:lnRef>
-          <a:fillRef idx="3">
-            <a:schemeClr val="accent1"/>
-          </a:fillRef>
-          <a:effectRef idx="2">
-            <a:schemeClr val="accent1"/>
-          </a:effectRef>
-          <a:fontRef idx="minor">
-            <a:schemeClr val="lt1"/>
-          </a:fontRef>
-        </p:style>
-        <p:txBody>
-          <a:bodyPr rtlCol="0" anchor="ctr"/>
-          <a:lstStyle/>
-          <a:p>
-            <a:pPr algn="ctr"/>
-          </a:p>
-        </p:txBody>
-      </p:sp>
-      <p:sp>
-        <p:nvSpPr>
-          <p:cNvPr id="5" name="TextBox 4"/>
-          <p:cNvSpPr txBox="1"/>
-          <p:nvPr/>
-        </p:nvSpPr>
-        <p:spPr>
-          <a:xfrm>
-            <a:off x="7086600" y="589788"/>
-            <a:ext cx="1371600" cy="237744"/>
-          </a:xfrm>
-          <a:prstGeom prst="rect">
-            <a:avLst/>
-          </a:prstGeom>
-          <a:noFill/>
-        </p:spPr>
-        <p:txBody>
-          <a:bodyPr wrap="square" lIns="0" rIns="0" tIns="0" bIns="0" anchor="t">
-            <a:spAutoFit/>
-          </a:bodyPr>
-          <a:lstStyle/>
-          <a:p>
-            <a:pPr algn="ctr">
-              <a:lnSpc>
-                <a:spcPct val="125000"/>
-              </a:lnSpc>
-              <a:spcAft>
-                <a:spcPts val="0"/>
-              </a:spcAft>
-            </a:pPr>
-            <a:r>
-              <a:rPr sz="1000" b="1" i="0" spc="100">
-                <a:solidFill>
-                  <a:srgbClr val="502961"/>
-                </a:solidFill>
-                <a:latin typeface="Karla"/>
-              </a:rPr>
-              <a:t>STRAIGHT</a:t>
             </a:r>
           </a:p>
         </p:txBody>
@@ -7552,11 +7112,11 @@
               </a:spcAft>
             </a:pPr>
             <a:r>
-              <a:rPr sz="3200" b="1" i="0">
+              <a:rPr sz="3200" b="0" i="0">
                 <a:solidFill>
                   <a:srgbClr val="FFFDF7"/>
                 </a:solidFill>
-                <a:latin typeface="Libre Caslon Display"/>
+                <a:latin typeface="Georgia"/>
               </a:rPr>
               <a:t>What this is about</a:t>
             </a:r>
@@ -7646,7 +7206,7 @@
                 <a:solidFill>
                   <a:srgbClr val="502961"/>
                 </a:solidFill>
-                <a:latin typeface="Karla"/>
+                <a:latin typeface="Calibri"/>
               </a:rPr>
               <a:t>Movement, mood and focus. What the next hour feels like, and nothing else.</a:t>
             </a:r>
@@ -7736,7 +7296,7 @@
                 <a:solidFill>
                   <a:srgbClr val="502961"/>
                 </a:solidFill>
-                <a:latin typeface="Karla"/>
+                <a:latin typeface="Calibri"/>
               </a:rPr>
               <a:t>It is not about how sporty you are, and nobody is being tested.</a:t>
             </a:r>
@@ -7826,7 +7386,7 @@
                 <a:solidFill>
                   <a:srgbClr val="502961"/>
                 </a:solidFill>
-                <a:latin typeface="Karla"/>
+                <a:latin typeface="Calibri"/>
               </a:rPr>
               <a:t>Your numbers stay on your sheet. Nobody is comparing them to anybody else’s.</a:t>
             </a:r>
@@ -7868,7 +7428,7 @@
                 <a:solidFill>
                   <a:srgbClr val="FFFDF7"/>
                 </a:solidFill>
-                <a:latin typeface="Karla"/>
+                <a:latin typeface="Calibri"/>
               </a:rPr>
               <a:t>Moving helps how you feel today.</a:t>
             </a:r>
@@ -7878,7 +7438,7 @@
                 <a:solidFill>
                   <a:srgbClr val="FFFDF7"/>
                 </a:solidFill>
-                <a:latin typeface="Karla"/>
+                <a:latin typeface="Calibri"/>
               </a:rPr>
               <a:t>If you are struggling with something bigger, tell someone.</a:t>
             </a:r>
@@ -7944,7 +7504,7 @@
                 <a:solidFill>
                   <a:srgbClr val="D8BCE4"/>
                 </a:solidFill>
-                <a:latin typeface="Karla"/>
+                <a:latin typeface="Calibri"/>
               </a:rPr>
               <a:t>The Pastoral Guide</a:t>
             </a:r>
@@ -7986,7 +7546,7 @@
                 <a:solidFill>
                   <a:srgbClr val="D8BCE4"/>
                 </a:solidFill>
-                <a:latin typeface="Karla"/>
+                <a:latin typeface="Calibri"/>
               </a:rPr>
               <a:t>14 / 22</a:t>
             </a:r>
@@ -8090,97 +7650,9 @@
                 <a:solidFill>
                   <a:srgbClr val="502961"/>
                 </a:solidFill>
-                <a:latin typeface="Karla"/>
+                <a:latin typeface="Calibri"/>
               </a:rPr>
               <a:t>THIS IS THE PART YOU WRITE DOWN</a:t>
-            </a:r>
-          </a:p>
-        </p:txBody>
-      </p:sp>
-      <p:sp>
-        <p:nvSpPr>
-          <p:cNvPr id="4" name="Rounded Rectangle 3"/>
-          <p:cNvSpPr/>
-          <p:nvPr/>
-        </p:nvSpPr>
-        <p:spPr>
-          <a:xfrm>
-            <a:off x="7086600" y="530352"/>
-            <a:ext cx="1371600" cy="347472"/>
-          </a:xfrm>
-          <a:prstGeom prst="roundRect">
-            <a:avLst>
-              <a:gd name="adj" fmla="val 50000"/>
-            </a:avLst>
-          </a:prstGeom>
-          <a:solidFill>
-            <a:srgbClr val="F0E4F5"/>
-          </a:solidFill>
-          <a:ln>
-            <a:noFill/>
-          </a:ln>
-          <a:effectLst/>
-        </p:spPr>
-        <p:style>
-          <a:lnRef idx="1">
-            <a:schemeClr val="accent1"/>
-          </a:lnRef>
-          <a:fillRef idx="3">
-            <a:schemeClr val="accent1"/>
-          </a:fillRef>
-          <a:effectRef idx="2">
-            <a:schemeClr val="accent1"/>
-          </a:effectRef>
-          <a:fontRef idx="minor">
-            <a:schemeClr val="lt1"/>
-          </a:fontRef>
-        </p:style>
-        <p:txBody>
-          <a:bodyPr rtlCol="0" anchor="ctr"/>
-          <a:lstStyle/>
-          <a:p>
-            <a:pPr algn="ctr"/>
-          </a:p>
-        </p:txBody>
-      </p:sp>
-      <p:sp>
-        <p:nvSpPr>
-          <p:cNvPr id="5" name="TextBox 4"/>
-          <p:cNvSpPr txBox="1"/>
-          <p:nvPr/>
-        </p:nvSpPr>
-        <p:spPr>
-          <a:xfrm>
-            <a:off x="7086600" y="589788"/>
-            <a:ext cx="1371600" cy="237744"/>
-          </a:xfrm>
-          <a:prstGeom prst="rect">
-            <a:avLst/>
-          </a:prstGeom>
-          <a:noFill/>
-        </p:spPr>
-        <p:txBody>
-          <a:bodyPr wrap="square" lIns="0" rIns="0" tIns="0" bIns="0" anchor="t">
-            <a:spAutoFit/>
-          </a:bodyPr>
-          <a:lstStyle/>
-          <a:p>
-            <a:pPr algn="ctr">
-              <a:lnSpc>
-                <a:spcPct val="125000"/>
-              </a:lnSpc>
-              <a:spcAft>
-                <a:spcPts val="0"/>
-              </a:spcAft>
-            </a:pPr>
-            <a:r>
-              <a:rPr sz="1000" b="1" i="0" spc="100">
-                <a:solidFill>
-                  <a:srgbClr val="502961"/>
-                </a:solidFill>
-                <a:latin typeface="Karla"/>
-              </a:rPr>
-              <a:t>LEARN</a:t>
             </a:r>
           </a:p>
         </p:txBody>
@@ -8216,11 +7688,11 @@
               </a:spcAft>
             </a:pPr>
             <a:r>
-              <a:rPr sz="3200" b="1" i="0">
+              <a:rPr sz="3200" b="0" i="0">
                 <a:solidFill>
                   <a:srgbClr val="2F2A36"/>
                 </a:solidFill>
-                <a:latin typeface="Libre Caslon Display"/>
+                <a:latin typeface="Georgia"/>
               </a:rPr>
               <a:t>The two numbers</a:t>
             </a:r>
@@ -8306,11 +7778,11 @@
               </a:spcAft>
             </a:pPr>
             <a:r>
-              <a:rPr sz="1500" b="1" i="0">
+              <a:rPr sz="1500" b="0" i="0">
                 <a:solidFill>
                   <a:srgbClr val="502961"/>
                 </a:solidFill>
-                <a:latin typeface="Libre Caslon Display"/>
+                <a:latin typeface="Georgia"/>
               </a:rPr>
               <a:t>Your pulse</a:t>
             </a:r>
@@ -8352,7 +7824,7 @@
                 <a:solidFill>
                   <a:srgbClr val="635C6B"/>
                 </a:solidFill>
-                <a:latin typeface="Karla"/>
+                <a:latin typeface="Calibri"/>
               </a:rPr>
               <a:t>How hard your heart is working, in beats per minute.</a:t>
             </a:r>
@@ -8394,7 +7866,7 @@
                 <a:solidFill>
                   <a:srgbClr val="2F2A36"/>
                 </a:solidFill>
-                <a:latin typeface="Karla"/>
+                <a:latin typeface="Calibri"/>
               </a:rPr>
               <a:t>Two fingers on your wrist, below the thumb. Do not use your thumb: it has its own pulse. Count for fifteen seconds and multiply by four.</a:t>
             </a:r>
@@ -8480,11 +7952,11 @@
               </a:spcAft>
             </a:pPr>
             <a:r>
-              <a:rPr sz="1500" b="1" i="0">
+              <a:rPr sz="1500" b="0" i="0">
                 <a:solidFill>
                   <a:srgbClr val="502961"/>
                 </a:solidFill>
-                <a:latin typeface="Libre Caslon Display"/>
+                <a:latin typeface="Georgia"/>
               </a:rPr>
               <a:t>Your focus score</a:t>
             </a:r>
@@ -8526,7 +7998,7 @@
                 <a:solidFill>
                   <a:srgbClr val="635C6B"/>
                 </a:solidFill>
-                <a:latin typeface="Karla"/>
+                <a:latin typeface="Calibri"/>
               </a:rPr>
               <a:t>How ready you are to start a piece of work, out of ten.</a:t>
             </a:r>
@@ -8568,7 +8040,7 @@
                 <a:solidFill>
                   <a:srgbClr val="2F2A36"/>
                 </a:solidFill>
-                <a:latin typeface="Karla"/>
+                <a:latin typeface="Calibri"/>
               </a:rPr>
               <a:t>1 to 3, you could not start. 4 to 6, you could if somebody made you. 7 to 10, you could start right now.</a:t>
             </a:r>
@@ -8610,7 +8082,7 @@
                 <a:solidFill>
                   <a:srgbClr val="502961"/>
                 </a:solidFill>
-                <a:latin typeface="Karla"/>
+                <a:latin typeface="Calibri"/>
               </a:rPr>
               <a:t>One number your body gives you, one number only you can give. You need both.</a:t>
             </a:r>
@@ -8676,7 +8148,7 @@
                 <a:solidFill>
                   <a:srgbClr val="9C95A3"/>
                 </a:solidFill>
-                <a:latin typeface="Karla"/>
+                <a:latin typeface="Calibri"/>
               </a:rPr>
               <a:t>The Pastoral Guide</a:t>
             </a:r>
@@ -8718,7 +8190,7 @@
                 <a:solidFill>
                   <a:srgbClr val="9C95A3"/>
                 </a:solidFill>
-                <a:latin typeface="Karla"/>
+                <a:latin typeface="Calibri"/>
               </a:rPr>
               <a:t>15 / 22</a:t>
             </a:r>
@@ -8822,97 +8294,9 @@
                 <a:solidFill>
                   <a:srgbClr val="502961"/>
                 </a:solidFill>
-                <a:latin typeface="Karla"/>
+                <a:latin typeface="Calibri"/>
               </a:rPr>
               <a:t>ON YOUR SHEET</a:t>
-            </a:r>
-          </a:p>
-        </p:txBody>
-      </p:sp>
-      <p:sp>
-        <p:nvSpPr>
-          <p:cNvPr id="4" name="Rounded Rectangle 3"/>
-          <p:cNvSpPr/>
-          <p:nvPr/>
-        </p:nvSpPr>
-        <p:spPr>
-          <a:xfrm>
-            <a:off x="7086600" y="530352"/>
-            <a:ext cx="1371600" cy="347472"/>
-          </a:xfrm>
-          <a:prstGeom prst="roundRect">
-            <a:avLst>
-              <a:gd name="adj" fmla="val 50000"/>
-            </a:avLst>
-          </a:prstGeom>
-          <a:solidFill>
-            <a:srgbClr val="F0E4F5"/>
-          </a:solidFill>
-          <a:ln>
-            <a:noFill/>
-          </a:ln>
-          <a:effectLst/>
-        </p:spPr>
-        <p:style>
-          <a:lnRef idx="1">
-            <a:schemeClr val="accent1"/>
-          </a:lnRef>
-          <a:fillRef idx="3">
-            <a:schemeClr val="accent1"/>
-          </a:fillRef>
-          <a:effectRef idx="2">
-            <a:schemeClr val="accent1"/>
-          </a:effectRef>
-          <a:fontRef idx="minor">
-            <a:schemeClr val="lt1"/>
-          </a:fontRef>
-        </p:style>
-        <p:txBody>
-          <a:bodyPr rtlCol="0" anchor="ctr"/>
-          <a:lstStyle/>
-          <a:p>
-            <a:pPr algn="ctr"/>
-          </a:p>
-        </p:txBody>
-      </p:sp>
-      <p:sp>
-        <p:nvSpPr>
-          <p:cNvPr id="5" name="TextBox 4"/>
-          <p:cNvSpPr txBox="1"/>
-          <p:nvPr/>
-        </p:nvSpPr>
-        <p:spPr>
-          <a:xfrm>
-            <a:off x="7086600" y="589788"/>
-            <a:ext cx="1371600" cy="237744"/>
-          </a:xfrm>
-          <a:prstGeom prst="rect">
-            <a:avLst/>
-          </a:prstGeom>
-          <a:noFill/>
-        </p:spPr>
-        <p:txBody>
-          <a:bodyPr wrap="square" lIns="0" rIns="0" tIns="0" bIns="0" anchor="t">
-            <a:spAutoFit/>
-          </a:bodyPr>
-          <a:lstStyle/>
-          <a:p>
-            <a:pPr algn="ctr">
-              <a:lnSpc>
-                <a:spcPct val="125000"/>
-              </a:lnSpc>
-              <a:spcAft>
-                <a:spcPts val="0"/>
-              </a:spcAft>
-            </a:pPr>
-            <a:r>
-              <a:rPr sz="1000" b="1" i="0" spc="100">
-                <a:solidFill>
-                  <a:srgbClr val="502961"/>
-                </a:solidFill>
-                <a:latin typeface="Karla"/>
-              </a:rPr>
-              <a:t>DO IT</a:t>
             </a:r>
           </a:p>
         </p:txBody>
@@ -8948,11 +8332,11 @@
               </a:spcAft>
             </a:pPr>
             <a:r>
-              <a:rPr sz="3100" b="1" i="0">
+              <a:rPr sz="3100" b="0" i="0">
                 <a:solidFill>
                   <a:srgbClr val="2F2A36"/>
                 </a:solidFill>
-                <a:latin typeface="Libre Caslon Display"/>
+                <a:latin typeface="Georgia"/>
               </a:rPr>
               <a:t>Your two starting numbers</a:t>
             </a:r>
@@ -8994,7 +8378,7 @@
                 <a:solidFill>
                   <a:srgbClr val="635C6B"/>
                 </a:solidFill>
-                <a:latin typeface="Karla"/>
+                <a:latin typeface="Calibri"/>
               </a:rPr>
               <a:t>Sitting down, quiet, right now. This is what next week gets compared against.</a:t>
             </a:r>
@@ -9124,11 +8508,11 @@
               </a:spcAft>
             </a:pPr>
             <a:r>
-              <a:rPr sz="1200" b="1" i="0">
+              <a:rPr sz="1200" b="0" i="0">
                 <a:solidFill>
                   <a:srgbClr val="FFFDF7"/>
                 </a:solidFill>
-                <a:latin typeface="Libre Caslon Display"/>
+                <a:latin typeface="Georgia"/>
               </a:rPr>
               <a:t>1</a:t>
             </a:r>
@@ -9170,7 +8554,7 @@
                 <a:solidFill>
                   <a:srgbClr val="2F2A36"/>
                 </a:solidFill>
-                <a:latin typeface="Karla"/>
+                <a:latin typeface="Calibri"/>
               </a:rPr>
               <a:t>Find your pulse. Fifteen seconds, then multiply by four. Write it down.</a:t>
             </a:r>
@@ -9300,11 +8684,11 @@
               </a:spcAft>
             </a:pPr>
             <a:r>
-              <a:rPr sz="1200" b="1" i="0">
+              <a:rPr sz="1200" b="0" i="0">
                 <a:solidFill>
                   <a:srgbClr val="FFFDF7"/>
                 </a:solidFill>
-                <a:latin typeface="Libre Caslon Display"/>
+                <a:latin typeface="Georgia"/>
               </a:rPr>
               <a:t>2</a:t>
             </a:r>
@@ -9346,7 +8730,7 @@
                 <a:solidFill>
                   <a:srgbClr val="2F2A36"/>
                 </a:solidFill>
-                <a:latin typeface="Karla"/>
+                <a:latin typeface="Calibri"/>
               </a:rPr>
               <a:t>Score your focus out of ten, using the scale on the previous slide.</a:t>
             </a:r>
@@ -9476,11 +8860,11 @@
               </a:spcAft>
             </a:pPr>
             <a:r>
-              <a:rPr sz="1200" b="1" i="0">
+              <a:rPr sz="1200" b="0" i="0">
                 <a:solidFill>
                   <a:srgbClr val="FFFDF7"/>
                 </a:solidFill>
-                <a:latin typeface="Libre Caslon Display"/>
+                <a:latin typeface="Georgia"/>
               </a:rPr>
               <a:t>3</a:t>
             </a:r>
@@ -9522,7 +8906,7 @@
                 <a:solidFill>
                   <a:srgbClr val="2F2A36"/>
                 </a:solidFill>
-                <a:latin typeface="Karla"/>
+                <a:latin typeface="Calibri"/>
               </a:rPr>
               <a:t>If you cannot find your pulse, use the one your teacher counts for you.</a:t>
             </a:r>
@@ -9564,7 +8948,7 @@
                 <a:solidFill>
                   <a:srgbClr val="502961"/>
                 </a:solidFill>
-                <a:latin typeface="Karla"/>
+                <a:latin typeface="Calibri"/>
               </a:rPr>
               <a:t>Anywhere from about sixty to a hundred at rest is ordinary. There is no good or bad score.</a:t>
             </a:r>
@@ -9630,7 +9014,7 @@
                 <a:solidFill>
                   <a:srgbClr val="9C95A3"/>
                 </a:solidFill>
-                <a:latin typeface="Karla"/>
+                <a:latin typeface="Calibri"/>
               </a:rPr>
               <a:t>The Pastoral Guide</a:t>
             </a:r>
@@ -9672,7 +9056,7 @@
                 <a:solidFill>
                   <a:srgbClr val="9C95A3"/>
                 </a:solidFill>
-                <a:latin typeface="Karla"/>
+                <a:latin typeface="Calibri"/>
               </a:rPr>
               <a:t>16 / 22</a:t>
             </a:r>
@@ -9776,97 +9160,9 @@
                 <a:solidFill>
                   <a:srgbClr val="502961"/>
                 </a:solidFill>
-                <a:latin typeface="Karla"/>
+                <a:latin typeface="Calibri"/>
               </a:rPr>
               <a:t>THE BIT LESSON TWO NEEDS</a:t>
-            </a:r>
-          </a:p>
-        </p:txBody>
-      </p:sp>
-      <p:sp>
-        <p:nvSpPr>
-          <p:cNvPr id="4" name="Rounded Rectangle 3"/>
-          <p:cNvSpPr/>
-          <p:nvPr/>
-        </p:nvSpPr>
-        <p:spPr>
-          <a:xfrm>
-            <a:off x="7086600" y="530352"/>
-            <a:ext cx="1371600" cy="347472"/>
-          </a:xfrm>
-          <a:prstGeom prst="roundRect">
-            <a:avLst>
-              <a:gd name="adj" fmla="val 50000"/>
-            </a:avLst>
-          </a:prstGeom>
-          <a:solidFill>
-            <a:srgbClr val="F0E4F5"/>
-          </a:solidFill>
-          <a:ln>
-            <a:noFill/>
-          </a:ln>
-          <a:effectLst/>
-        </p:spPr>
-        <p:style>
-          <a:lnRef idx="1">
-            <a:schemeClr val="accent1"/>
-          </a:lnRef>
-          <a:fillRef idx="3">
-            <a:schemeClr val="accent1"/>
-          </a:fillRef>
-          <a:effectRef idx="2">
-            <a:schemeClr val="accent1"/>
-          </a:effectRef>
-          <a:fontRef idx="minor">
-            <a:schemeClr val="lt1"/>
-          </a:fontRef>
-        </p:style>
-        <p:txBody>
-          <a:bodyPr rtlCol="0" anchor="ctr"/>
-          <a:lstStyle/>
-          <a:p>
-            <a:pPr algn="ctr"/>
-          </a:p>
-        </p:txBody>
-      </p:sp>
-      <p:sp>
-        <p:nvSpPr>
-          <p:cNvPr id="5" name="TextBox 4"/>
-          <p:cNvSpPr txBox="1"/>
-          <p:nvPr/>
-        </p:nvSpPr>
-        <p:spPr>
-          <a:xfrm>
-            <a:off x="7086600" y="589788"/>
-            <a:ext cx="1371600" cy="237744"/>
-          </a:xfrm>
-          <a:prstGeom prst="rect">
-            <a:avLst/>
-          </a:prstGeom>
-          <a:noFill/>
-        </p:spPr>
-        <p:txBody>
-          <a:bodyPr wrap="square" lIns="0" rIns="0" tIns="0" bIns="0" anchor="t">
-            <a:spAutoFit/>
-          </a:bodyPr>
-          <a:lstStyle/>
-          <a:p>
-            <a:pPr algn="ctr">
-              <a:lnSpc>
-                <a:spcPct val="125000"/>
-              </a:lnSpc>
-              <a:spcAft>
-                <a:spcPts val="0"/>
-              </a:spcAft>
-            </a:pPr>
-            <a:r>
-              <a:rPr sz="1000" b="1" i="0" spc="100">
-                <a:solidFill>
-                  <a:srgbClr val="502961"/>
-                </a:solidFill>
-                <a:latin typeface="Karla"/>
-              </a:rPr>
-              <a:t>PREDICT</a:t>
             </a:r>
           </a:p>
         </p:txBody>
@@ -9902,11 +9198,11 @@
               </a:spcAft>
             </a:pPr>
             <a:r>
-              <a:rPr sz="3200" b="1" i="0">
+              <a:rPr sz="3200" b="0" i="0">
                 <a:solidFill>
                   <a:srgbClr val="2F2A36"/>
                 </a:solidFill>
-                <a:latin typeface="Libre Caslon Display"/>
+                <a:latin typeface="Georgia"/>
               </a:rPr>
               <a:t>Write your prediction</a:t>
             </a:r>
@@ -9948,7 +9244,7 @@
                 <a:solidFill>
                   <a:srgbClr val="635C6B"/>
                 </a:solidFill>
-                <a:latin typeface="Karla"/>
+                <a:latin typeface="Calibri"/>
               </a:rPr>
               <a:t>Numbers, not words. Next week you find out how close you were.</a:t>
             </a:r>
@@ -10034,11 +9330,11 @@
               </a:spcAft>
             </a:pPr>
             <a:r>
-              <a:rPr sz="1250" b="1" i="0">
+              <a:rPr sz="1250" b="0" i="0">
                 <a:solidFill>
                   <a:srgbClr val="502961"/>
                 </a:solidFill>
-                <a:latin typeface="Libre Caslon Display"/>
+                <a:latin typeface="Georgia"/>
               </a:rPr>
               <a:t>Straight after five minutes of moving</a:t>
             </a:r>
@@ -10080,7 +9376,7 @@
                 <a:solidFill>
                   <a:srgbClr val="635C6B"/>
                 </a:solidFill>
-                <a:latin typeface="Karla"/>
+                <a:latin typeface="Calibri"/>
               </a:rPr>
               <a:t>My pulse will be ____   ·   my focus will be ____</a:t>
             </a:r>
@@ -10166,11 +9462,11 @@
               </a:spcAft>
             </a:pPr>
             <a:r>
-              <a:rPr sz="1250" b="1" i="0">
+              <a:rPr sz="1250" b="0" i="0">
                 <a:solidFill>
                   <a:srgbClr val="502961"/>
                 </a:solidFill>
-                <a:latin typeface="Libre Caslon Display"/>
+                <a:latin typeface="Georgia"/>
               </a:rPr>
               <a:t>Ten minutes after that</a:t>
             </a:r>
@@ -10212,7 +9508,7 @@
                 <a:solidFill>
                   <a:srgbClr val="635C6B"/>
                 </a:solidFill>
-                <a:latin typeface="Karla"/>
+                <a:latin typeface="Calibri"/>
               </a:rPr>
               <a:t>My focus will be ____</a:t>
             </a:r>
@@ -10298,11 +9594,11 @@
               </a:spcAft>
             </a:pPr>
             <a:r>
-              <a:rPr sz="1250" b="1" i="0">
+              <a:rPr sz="1250" b="0" i="0">
                 <a:solidFill>
                   <a:srgbClr val="502961"/>
                 </a:solidFill>
-                <a:latin typeface="Libre Caslon Display"/>
+                <a:latin typeface="Georgia"/>
               </a:rPr>
               <a:t>The one nobody guesses right</a:t>
             </a:r>
@@ -10344,7 +9640,7 @@
                 <a:solidFill>
                   <a:srgbClr val="635C6B"/>
                 </a:solidFill>
-                <a:latin typeface="Karla"/>
+                <a:latin typeface="Calibri"/>
               </a:rPr>
               <a:t>How long will any of it still be there?</a:t>
             </a:r>
@@ -10386,7 +9682,7 @@
                 <a:solidFill>
                   <a:srgbClr val="502961"/>
                 </a:solidFill>
-                <a:latin typeface="Karla"/>
+                <a:latin typeface="Calibri"/>
               </a:rPr>
               <a:t>Put a number in every gap. A prediction with no number in it cannot be tested.</a:t>
             </a:r>
@@ -10452,7 +9748,7 @@
                 <a:solidFill>
                   <a:srgbClr val="9C95A3"/>
                 </a:solidFill>
-                <a:latin typeface="Karla"/>
+                <a:latin typeface="Calibri"/>
               </a:rPr>
               <a:t>The Pastoral Guide</a:t>
             </a:r>
@@ -10494,7 +9790,7 @@
                 <a:solidFill>
                   <a:srgbClr val="9C95A3"/>
                 </a:solidFill>
-                <a:latin typeface="Karla"/>
+                <a:latin typeface="Calibri"/>
               </a:rPr>
               <a:t>17 / 22</a:t>
             </a:r>
@@ -10598,97 +9894,9 @@
                 <a:solidFill>
                   <a:srgbClr val="D8BCE4"/>
                 </a:solidFill>
-                <a:latin typeface="Karla"/>
+                <a:latin typeface="Calibri"/>
               </a:rPr>
               <a:t>WHAT TO EXPECT</a:t>
-            </a:r>
-          </a:p>
-        </p:txBody>
-      </p:sp>
-      <p:sp>
-        <p:nvSpPr>
-          <p:cNvPr id="4" name="Rounded Rectangle 3"/>
-          <p:cNvSpPr/>
-          <p:nvPr/>
-        </p:nvSpPr>
-        <p:spPr>
-          <a:xfrm>
-            <a:off x="7086600" y="530352"/>
-            <a:ext cx="1371600" cy="347472"/>
-          </a:xfrm>
-          <a:prstGeom prst="roundRect">
-            <a:avLst>
-              <a:gd name="adj" fmla="val 50000"/>
-            </a:avLst>
-          </a:prstGeom>
-          <a:solidFill>
-            <a:srgbClr val="FFFDF7"/>
-          </a:solidFill>
-          <a:ln>
-            <a:noFill/>
-          </a:ln>
-          <a:effectLst/>
-        </p:spPr>
-        <p:style>
-          <a:lnRef idx="1">
-            <a:schemeClr val="accent1"/>
-          </a:lnRef>
-          <a:fillRef idx="3">
-            <a:schemeClr val="accent1"/>
-          </a:fillRef>
-          <a:effectRef idx="2">
-            <a:schemeClr val="accent1"/>
-          </a:effectRef>
-          <a:fontRef idx="minor">
-            <a:schemeClr val="lt1"/>
-          </a:fontRef>
-        </p:style>
-        <p:txBody>
-          <a:bodyPr rtlCol="0" anchor="ctr"/>
-          <a:lstStyle/>
-          <a:p>
-            <a:pPr algn="ctr"/>
-          </a:p>
-        </p:txBody>
-      </p:sp>
-      <p:sp>
-        <p:nvSpPr>
-          <p:cNvPr id="5" name="TextBox 4"/>
-          <p:cNvSpPr txBox="1"/>
-          <p:nvPr/>
-        </p:nvSpPr>
-        <p:spPr>
-          <a:xfrm>
-            <a:off x="7086600" y="589788"/>
-            <a:ext cx="1371600" cy="237744"/>
-          </a:xfrm>
-          <a:prstGeom prst="rect">
-            <a:avLst/>
-          </a:prstGeom>
-          <a:noFill/>
-        </p:spPr>
-        <p:txBody>
-          <a:bodyPr wrap="square" lIns="0" rIns="0" tIns="0" bIns="0" anchor="t">
-            <a:spAutoFit/>
-          </a:bodyPr>
-          <a:lstStyle/>
-          <a:p>
-            <a:pPr algn="ctr">
-              <a:lnSpc>
-                <a:spcPct val="125000"/>
-              </a:lnSpc>
-              <a:spcAft>
-                <a:spcPts val="0"/>
-              </a:spcAft>
-            </a:pPr>
-            <a:r>
-              <a:rPr sz="1000" b="1" i="0" spc="100">
-                <a:solidFill>
-                  <a:srgbClr val="502961"/>
-                </a:solidFill>
-                <a:latin typeface="Karla"/>
-              </a:rPr>
-              <a:t>COMPARE</a:t>
             </a:r>
           </a:p>
         </p:txBody>
@@ -10724,11 +9932,11 @@
               </a:spcAft>
             </a:pPr>
             <a:r>
-              <a:rPr sz="2900" b="1" i="0">
+              <a:rPr sz="2900" b="0" i="0">
                 <a:solidFill>
                   <a:srgbClr val="FFFDF7"/>
                 </a:solidFill>
-                <a:latin typeface="Libre Caslon Display"/>
+                <a:latin typeface="Georgia"/>
               </a:rPr>
               <a:t>Two things that catch people out</a:t>
             </a:r>
@@ -10814,11 +10022,11 @@
               </a:spcAft>
             </a:pPr>
             <a:r>
-              <a:rPr sz="1350" b="1" i="0">
+              <a:rPr sz="1350" b="0" i="0">
                 <a:solidFill>
                   <a:srgbClr val="502961"/>
                 </a:solidFill>
-                <a:latin typeface="Libre Caslon Display"/>
+                <a:latin typeface="Georgia"/>
               </a:rPr>
               <a:t>Whoever moves least usually feels it most.</a:t>
             </a:r>
@@ -10860,7 +10068,7 @@
                 <a:solidFill>
                   <a:srgbClr val="635C6B"/>
                 </a:solidFill>
-                <a:latin typeface="Karla"/>
+                <a:latin typeface="Calibri"/>
               </a:rPr>
               <a:t>The change is largest for the people who were sitting still the longest.</a:t>
             </a:r>
@@ -10946,11 +10154,11 @@
               </a:spcAft>
             </a:pPr>
             <a:r>
-              <a:rPr sz="1350" b="1" i="0">
+              <a:rPr sz="1350" b="0" i="0">
                 <a:solidFill>
                   <a:srgbClr val="502961"/>
                 </a:solidFill>
-                <a:latin typeface="Libre Caslon Display"/>
+                <a:latin typeface="Georgia"/>
               </a:rPr>
               <a:t>It does not have to be hard to work.</a:t>
             </a:r>
@@ -10992,7 +10200,7 @@
                 <a:solidFill>
                   <a:srgbClr val="635C6B"/>
                 </a:solidFill>
-                <a:latin typeface="Karla"/>
+                <a:latin typeface="Calibri"/>
               </a:rPr>
               <a:t>Noticing your breathing is enough. Exhausting yourself is not the point.</a:t>
             </a:r>
@@ -11034,7 +10242,7 @@
                 <a:solidFill>
                   <a:srgbClr val="FFFDF7"/>
                 </a:solidFill>
-                <a:latin typeface="Karla"/>
+                <a:latin typeface="Calibri"/>
               </a:rPr>
               <a:t>We are not measuring effort here, we are measuring change.</a:t>
             </a:r>
@@ -11100,7 +10308,7 @@
                 <a:solidFill>
                   <a:srgbClr val="D8BCE4"/>
                 </a:solidFill>
-                <a:latin typeface="Karla"/>
+                <a:latin typeface="Calibri"/>
               </a:rPr>
               <a:t>The Pastoral Guide</a:t>
             </a:r>
@@ -11142,7 +10350,7 @@
                 <a:solidFill>
                   <a:srgbClr val="D8BCE4"/>
                 </a:solidFill>
-                <a:latin typeface="Karla"/>
+                <a:latin typeface="Calibri"/>
               </a:rPr>
               <a:t>18 / 22</a:t>
             </a:r>
@@ -11246,7 +10454,7 @@
                 <a:solidFill>
                   <a:srgbClr val="502961"/>
                 </a:solidFill>
-                <a:latin typeface="Karla"/>
+                <a:latin typeface="Calibri"/>
               </a:rPr>
               <a:t>NEXT LESSON</a:t>
             </a:r>
@@ -11334,7 +10542,7 @@
                 <a:solidFill>
                   <a:srgbClr val="502961"/>
                 </a:solidFill>
-                <a:latin typeface="Karla"/>
+                <a:latin typeface="Calibri"/>
               </a:rPr>
               <a:t>NEXT WEEK</a:t>
             </a:r>
@@ -11372,11 +10580,11 @@
               </a:spcAft>
             </a:pPr>
             <a:r>
-              <a:rPr sz="3200" b="1" i="0">
+              <a:rPr sz="3200" b="0" i="0">
                 <a:solidFill>
                   <a:srgbClr val="2F2A36"/>
                 </a:solidFill>
-                <a:latin typeface="Libre Caslon Display"/>
+                <a:latin typeface="Georgia"/>
               </a:rPr>
               <a:t>You pick one of three</a:t>
             </a:r>
@@ -11418,7 +10626,7 @@
                 <a:solidFill>
                   <a:srgbClr val="635C6B"/>
                 </a:solidFill>
-                <a:latin typeface="Karla"/>
+                <a:latin typeface="Calibri"/>
               </a:rPr>
               <a:t>All three are five minutes, all three happen next to your own chair.</a:t>
             </a:r>
@@ -11572,11 +10780,11 @@
               </a:spcAft>
             </a:pPr>
             <a:r>
-              <a:rPr sz="1300" b="1" i="0">
+              <a:rPr sz="1300" b="0" i="0">
                 <a:solidFill>
                   <a:srgbClr val="502961"/>
                 </a:solidFill>
-                <a:latin typeface="Libre Caslon Display"/>
+                <a:latin typeface="Georgia"/>
               </a:rPr>
               <a:t>Bursts</a:t>
             </a:r>
@@ -11618,7 +10826,7 @@
                 <a:solidFill>
                   <a:srgbClr val="635C6B"/>
                 </a:solidFill>
-                <a:latin typeface="Karla"/>
+                <a:latin typeface="Calibri"/>
               </a:rPr>
               <a:t>Sixty seconds on, ten off, four times. Marching or star jumps.</a:t>
             </a:r>
@@ -11772,11 +10980,11 @@
               </a:spcAft>
             </a:pPr>
             <a:r>
-              <a:rPr sz="1300" b="1" i="0">
+              <a:rPr sz="1300" b="0" i="0">
                 <a:solidFill>
                   <a:srgbClr val="502961"/>
                 </a:solidFill>
-                <a:latin typeface="Libre Caslon Display"/>
+                <a:latin typeface="Georgia"/>
               </a:rPr>
               <a:t>Strength</a:t>
             </a:r>
@@ -11818,7 +11026,7 @@
                 <a:solidFill>
                   <a:srgbClr val="635C6B"/>
                 </a:solidFill>
-                <a:latin typeface="Karla"/>
+                <a:latin typeface="Calibri"/>
               </a:rPr>
               <a:t>Wall press-ups, chair squats, calf raises. Slow and controlled.</a:t>
             </a:r>
@@ -11972,11 +11180,11 @@
               </a:spcAft>
             </a:pPr>
             <a:r>
-              <a:rPr sz="1300" b="1" i="0">
+              <a:rPr sz="1300" b="0" i="0">
                 <a:solidFill>
                   <a:srgbClr val="502961"/>
                 </a:solidFill>
-                <a:latin typeface="Libre Caslon Display"/>
+                <a:latin typeface="Georgia"/>
               </a:rPr>
               <a:t>Stretch and breathe</a:t>
             </a:r>
@@ -12018,7 +11226,7 @@
                 <a:solidFill>
                   <a:srgbClr val="635C6B"/>
                 </a:solidFill>
-                <a:latin typeface="Karla"/>
+                <a:latin typeface="Calibri"/>
               </a:rPr>
               <a:t>The quietest one. Slow stretches and breathing.</a:t>
             </a:r>
@@ -12060,7 +11268,7 @@
                 <a:solidFill>
                   <a:srgbClr val="502961"/>
                 </a:solidFill>
-                <a:latin typeface="Karla"/>
+                <a:latin typeface="Calibri"/>
               </a:rPr>
               <a:t>Nothing to bring and nothing to change into.</a:t>
             </a:r>
@@ -12070,7 +11278,7 @@
                 <a:solidFill>
                   <a:srgbClr val="502961"/>
                 </a:solidFill>
-                <a:latin typeface="Karla"/>
+                <a:latin typeface="Calibri"/>
               </a:rPr>
               <a:t>Tell your teacher today if moving is a problem for you.</a:t>
             </a:r>
@@ -12136,7 +11344,7 @@
                 <a:solidFill>
                   <a:srgbClr val="9C95A3"/>
                 </a:solidFill>
-                <a:latin typeface="Karla"/>
+                <a:latin typeface="Calibri"/>
               </a:rPr>
               <a:t>The Pastoral Guide</a:t>
             </a:r>
@@ -12178,7 +11386,7 @@
                 <a:solidFill>
                   <a:srgbClr val="9C95A3"/>
                 </a:solidFill>
-                <a:latin typeface="Karla"/>
+                <a:latin typeface="Calibri"/>
               </a:rPr>
               <a:t>19 / 22</a:t>
             </a:r>
@@ -12328,7 +11536,7 @@
                 <a:solidFill>
                   <a:srgbClr val="502961"/>
                 </a:solidFill>
-                <a:latin typeface="Karla"/>
+                <a:latin typeface="Calibri"/>
               </a:rPr>
               <a:t>TEACHER SLIDE  ·  SKIP IT</a:t>
             </a:r>
@@ -12370,7 +11578,7 @@
                 <a:solidFill>
                   <a:srgbClr val="502961"/>
                 </a:solidFill>
-                <a:latin typeface="Karla"/>
+                <a:latin typeface="Calibri"/>
               </a:rPr>
               <a:t>WHERE THIS LESSON SITS</a:t>
             </a:r>
@@ -12408,11 +11616,11 @@
               </a:spcAft>
             </a:pPr>
             <a:r>
-              <a:rPr sz="3100" b="1" i="0">
+              <a:rPr sz="3100" b="0" i="0">
                 <a:solidFill>
                   <a:srgbClr val="2F2A36"/>
                 </a:solidFill>
-                <a:latin typeface="Libre Caslon Display"/>
+                <a:latin typeface="Georgia"/>
               </a:rPr>
               <a:t>Three lessons, one idea</a:t>
             </a:r>
@@ -12542,11 +11750,11 @@
               </a:spcAft>
             </a:pPr>
             <a:r>
-              <a:rPr sz="1500" b="1" i="0">
+              <a:rPr sz="1500" b="0" i="0">
                 <a:solidFill>
                   <a:srgbClr val="FFFDF7"/>
                 </a:solidFill>
-                <a:latin typeface="Libre Caslon Display"/>
+                <a:latin typeface="Georgia"/>
               </a:rPr>
               <a:t>1</a:t>
             </a:r>
@@ -12584,11 +11792,11 @@
               </a:spcAft>
             </a:pPr>
             <a:r>
-              <a:rPr sz="1450" b="1" i="0">
+              <a:rPr sz="1450" b="0" i="0">
                 <a:solidFill>
                   <a:srgbClr val="502961"/>
                 </a:solidFill>
-                <a:latin typeface="Libre Caslon Display"/>
+                <a:latin typeface="Georgia"/>
               </a:rPr>
               <a:t>The science</a:t>
             </a:r>
@@ -12630,7 +11838,7 @@
                 <a:solidFill>
                   <a:srgbClr val="635C6B"/>
                 </a:solidFill>
-                <a:latin typeface="Karla"/>
+                <a:latin typeface="Calibri"/>
               </a:rPr>
               <a:t>What movement does, and everyone writes a prediction.</a:t>
             </a:r>
@@ -12760,11 +11968,11 @@
               </a:spcAft>
             </a:pPr>
             <a:r>
-              <a:rPr sz="1500" b="1" i="0">
+              <a:rPr sz="1500" b="0" i="0">
                 <a:solidFill>
                   <a:srgbClr val="FFFDF7"/>
                 </a:solidFill>
-                <a:latin typeface="Libre Caslon Display"/>
+                <a:latin typeface="Georgia"/>
               </a:rPr>
               <a:t>2</a:t>
             </a:r>
@@ -12802,11 +12010,11 @@
               </a:spcAft>
             </a:pPr>
             <a:r>
-              <a:rPr sz="1450" b="1" i="0">
+              <a:rPr sz="1450" b="0" i="0">
                 <a:solidFill>
                   <a:srgbClr val="502961"/>
                 </a:solidFill>
-                <a:latin typeface="Libre Caslon Display"/>
+                <a:latin typeface="Georgia"/>
               </a:rPr>
               <a:t>The experiment</a:t>
             </a:r>
@@ -12848,7 +12056,7 @@
                 <a:solidFill>
                   <a:srgbClr val="635C6B"/>
                 </a:solidFill>
-                <a:latin typeface="Karla"/>
+                <a:latin typeface="Calibri"/>
               </a:rPr>
               <a:t>Five minutes of it, measured before and after.</a:t>
             </a:r>
@@ -12978,11 +12186,11 @@
               </a:spcAft>
             </a:pPr>
             <a:r>
-              <a:rPr sz="1500" b="1" i="0">
+              <a:rPr sz="1500" b="0" i="0">
                 <a:solidFill>
                   <a:srgbClr val="FFFDF7"/>
                 </a:solidFill>
-                <a:latin typeface="Libre Caslon Display"/>
+                <a:latin typeface="Georgia"/>
               </a:rPr>
               <a:t>3</a:t>
             </a:r>
@@ -13020,11 +12228,11 @@
               </a:spcAft>
             </a:pPr>
             <a:r>
-              <a:rPr sz="1450" b="1" i="0">
+              <a:rPr sz="1450" b="0" i="0">
                 <a:solidFill>
                   <a:srgbClr val="502961"/>
                 </a:solidFill>
-                <a:latin typeface="Libre Caslon Display"/>
+                <a:latin typeface="Georgia"/>
               </a:rPr>
               <a:t>Their own plan</a:t>
             </a:r>
@@ -13066,7 +12274,7 @@
                 <a:solidFill>
                   <a:srgbClr val="635C6B"/>
                 </a:solidFill>
-                <a:latin typeface="Karla"/>
+                <a:latin typeface="Calibri"/>
               </a:rPr>
               <a:t>Four weeks, designed to survive a bad day.</a:t>
             </a:r>
@@ -13108,7 +12316,7 @@
                 <a:solidFill>
                   <a:srgbClr val="502961"/>
                 </a:solidFill>
-                <a:latin typeface="Karla"/>
+                <a:latin typeface="Calibri"/>
               </a:rPr>
               <a:t>This one ends with a written prediction. Lesson two tests it, so they have to keep it.</a:t>
             </a:r>
@@ -13174,7 +12382,7 @@
                 <a:solidFill>
                   <a:srgbClr val="9C95A3"/>
                 </a:solidFill>
-                <a:latin typeface="Karla"/>
+                <a:latin typeface="Calibri"/>
               </a:rPr>
               <a:t>The Pastoral Guide</a:t>
             </a:r>
@@ -13216,7 +12424,7 @@
                 <a:solidFill>
                   <a:srgbClr val="9C95A3"/>
                 </a:solidFill>
-                <a:latin typeface="Karla"/>
+                <a:latin typeface="Calibri"/>
               </a:rPr>
               <a:t>2 / 22</a:t>
             </a:r>
@@ -13320,7 +12528,7 @@
                 <a:solidFill>
                   <a:srgbClr val="D8BCE4"/>
                 </a:solidFill>
-                <a:latin typeface="Karla"/>
+                <a:latin typeface="Calibri"/>
               </a:rPr>
               <a:t>IF YOU REMEMBER ONE THING</a:t>
             </a:r>
@@ -13358,21 +12566,21 @@
               </a:spcAft>
             </a:pPr>
             <a:r>
-              <a:rPr sz="3400" b="1" i="0">
+              <a:rPr sz="3400" b="0" i="0">
                 <a:solidFill>
                   <a:srgbClr val="FFFDF7"/>
                 </a:solidFill>
-                <a:latin typeface="Libre Caslon Display"/>
+                <a:latin typeface="Georgia"/>
               </a:rPr>
               <a:t>Five minutes changes</a:t>
             </a:r>
             <a:br/>
             <a:r>
-              <a:rPr sz="3400" b="1" i="0">
+              <a:rPr sz="3400" b="0" i="0">
                 <a:solidFill>
                   <a:srgbClr val="FFFDF7"/>
                 </a:solidFill>
-                <a:latin typeface="Libre Caslon Display"/>
+                <a:latin typeface="Georgia"/>
               </a:rPr>
               <a:t>the hour you are in.</a:t>
             </a:r>
@@ -13458,7 +12666,7 @@
                 <a:solidFill>
                   <a:srgbClr val="D8BCE4"/>
                 </a:solidFill>
-                <a:latin typeface="Karla"/>
+                <a:latin typeface="Calibri"/>
               </a:rPr>
               <a:t>Your mood and your focus, for the next hour or so.</a:t>
             </a:r>
@@ -13468,7 +12676,7 @@
                 <a:solidFill>
                   <a:srgbClr val="D8BCE4"/>
                 </a:solidFill>
-                <a:latin typeface="Karla"/>
+                <a:latin typeface="Calibri"/>
               </a:rPr>
               <a:t>That is reason enough to bother.</a:t>
             </a:r>
@@ -13534,7 +12742,7 @@
                 <a:solidFill>
                   <a:srgbClr val="D8BCE4"/>
                 </a:solidFill>
-                <a:latin typeface="Karla"/>
+                <a:latin typeface="Calibri"/>
               </a:rPr>
               <a:t>The Pastoral Guide</a:t>
             </a:r>
@@ -13576,7 +12784,7 @@
                 <a:solidFill>
                   <a:srgbClr val="D8BCE4"/>
                 </a:solidFill>
-                <a:latin typeface="Karla"/>
+                <a:latin typeface="Calibri"/>
               </a:rPr>
               <a:t>20 / 22</a:t>
             </a:r>
@@ -13700,11 +12908,11 @@
               </a:spcAft>
             </a:pPr>
             <a:r>
-              <a:rPr sz="3000" b="1" i="0">
+              <a:rPr sz="3000" b="0" i="0">
                 <a:solidFill>
                   <a:srgbClr val="502961"/>
                 </a:solidFill>
-                <a:latin typeface="Libre Caslon Display"/>
+                <a:latin typeface="Georgia"/>
               </a:rPr>
               <a:t>Bring your prediction next week.</a:t>
             </a:r>
@@ -13746,7 +12954,7 @@
                 <a:solidFill>
                   <a:srgbClr val="635C6B"/>
                 </a:solidFill>
-                <a:latin typeface="Karla"/>
+                <a:latin typeface="Calibri"/>
               </a:rPr>
               <a:t>We are going to test it on this room,</a:t>
             </a:r>
@@ -13756,7 +12964,7 @@
                 <a:solidFill>
                   <a:srgbClr val="635C6B"/>
                 </a:solidFill>
-                <a:latin typeface="Karla"/>
+                <a:latin typeface="Calibri"/>
               </a:rPr>
               <a:t>and you will find out whether you were right.</a:t>
             </a:r>
@@ -13798,7 +13006,7 @@
                 <a:solidFill>
                   <a:srgbClr val="9C95A3"/>
                 </a:solidFill>
-                <a:latin typeface="Karla"/>
+                <a:latin typeface="Calibri"/>
               </a:rPr>
               <a:t>Movement and Mental Health  ·  Lesson 1 of 3</a:t>
             </a:r>
@@ -13864,7 +13072,7 @@
                 <a:solidFill>
                   <a:srgbClr val="9C95A3"/>
                 </a:solidFill>
-                <a:latin typeface="Karla"/>
+                <a:latin typeface="Calibri"/>
               </a:rPr>
               <a:t>The Pastoral Guide</a:t>
             </a:r>
@@ -13906,7 +13114,7 @@
                 <a:solidFill>
                   <a:srgbClr val="9C95A3"/>
                 </a:solidFill>
-                <a:latin typeface="Karla"/>
+                <a:latin typeface="Calibri"/>
               </a:rPr>
               <a:t>21 / 22</a:t>
             </a:r>
@@ -14056,7 +13264,7 @@
                 <a:solidFill>
                   <a:srgbClr val="502961"/>
                 </a:solidFill>
-                <a:latin typeface="Karla"/>
+                <a:latin typeface="Calibri"/>
               </a:rPr>
               <a:t>TEACHER SLIDE  ·  SKIP IT</a:t>
             </a:r>
@@ -14098,7 +13306,7 @@
                 <a:solidFill>
                   <a:srgbClr val="502961"/>
                 </a:solidFill>
-                <a:latin typeface="Karla"/>
+                <a:latin typeface="Calibri"/>
               </a:rPr>
               <a:t>FOR THE TEACHER</a:t>
             </a:r>
@@ -14136,11 +13344,11 @@
               </a:spcAft>
             </a:pPr>
             <a:r>
-              <a:rPr sz="3100" b="1" i="0">
+              <a:rPr sz="3100" b="0" i="0">
                 <a:solidFill>
                   <a:srgbClr val="2F2A36"/>
                 </a:solidFill>
-                <a:latin typeface="Libre Caslon Display"/>
+                <a:latin typeface="Georgia"/>
               </a:rPr>
               <a:t>References</a:t>
             </a:r>
@@ -14230,7 +13438,7 @@
                 <a:solidFill>
                   <a:srgbClr val="6E4585"/>
                 </a:solidFill>
-                <a:latin typeface="Karla"/>
+                <a:latin typeface="Calibri"/>
               </a:rPr>
               <a:t>SLIDES 10 AND 11 OF THIS LESSON, AND SLIDE 12 OF LESSON TWO</a:t>
             </a:r>
@@ -14272,7 +13480,7 @@
                 <a:solidFill>
                   <a:srgbClr val="2F2A36"/>
                 </a:solidFill>
-                <a:latin typeface="Karla"/>
+                <a:latin typeface="Calibri"/>
               </a:rPr>
               <a:t>Xiao, X. (2026). Frontiers in Psychology, 17, 1781997.</a:t>
             </a:r>
@@ -14362,7 +13570,7 @@
                 <a:solidFill>
                   <a:srgbClr val="6E4585"/>
                 </a:solidFill>
-                <a:latin typeface="Karla"/>
+                <a:latin typeface="Calibri"/>
               </a:rPr>
               <a:t>SLIDE 12 OF THIS LESSON</a:t>
             </a:r>
@@ -14404,7 +13612,7 @@
                 <a:solidFill>
                   <a:srgbClr val="2F2A36"/>
                 </a:solidFill>
-                <a:latin typeface="Karla"/>
+                <a:latin typeface="Calibri"/>
               </a:rPr>
               <a:t>Pontifex, M. B., Saliba, B. J., Raine, L. B., Picchietti, D. L. &amp; Hillman, C. H. (2013). The Journal of Pediatrics, 162(3), 543–551.</a:t>
             </a:r>
@@ -14494,7 +13702,7 @@
                 <a:solidFill>
                   <a:srgbClr val="6E4585"/>
                 </a:solidFill>
-                <a:latin typeface="Karla"/>
+                <a:latin typeface="Calibri"/>
               </a:rPr>
               <a:t>SLIDE 13 OF THIS LESSON</a:t>
             </a:r>
@@ -14536,7 +13744,7 @@
                 <a:solidFill>
                   <a:srgbClr val="2F2A36"/>
                 </a:solidFill>
-                <a:latin typeface="Karla"/>
+                <a:latin typeface="Calibri"/>
               </a:rPr>
               <a:t>Reyes-Amigo, T. et al. (2025). Frontiers in Public Health, 13, 1469998.</a:t>
             </a:r>
@@ -14626,7 +13834,7 @@
                 <a:solidFill>
                   <a:srgbClr val="6E4585"/>
                 </a:solidFill>
-                <a:latin typeface="Karla"/>
+                <a:latin typeface="Calibri"/>
               </a:rPr>
               <a:t>SLIDE 4 OF LESSON THREE</a:t>
             </a:r>
@@ -14668,7 +13876,7 @@
                 <a:solidFill>
                   <a:srgbClr val="2F2A36"/>
                 </a:solidFill>
-                <a:latin typeface="Karla"/>
+                <a:latin typeface="Calibri"/>
               </a:rPr>
               <a:t>Recchia, F., Bernal, J. D. K., Fong, D. Y. et al. (2023). JAMA Pediatrics, 177(2), 132–140.</a:t>
             </a:r>
@@ -14710,7 +13918,7 @@
                 <a:solidFill>
                   <a:srgbClr val="502961"/>
                 </a:solidFill>
-                <a:latin typeface="Karla"/>
+                <a:latin typeface="Calibri"/>
               </a:rPr>
               <a:t>Full titles are on the last page of the pack. Every figure quoted comes from these four.</a:t>
             </a:r>
@@ -14776,7 +13984,7 @@
                 <a:solidFill>
                   <a:srgbClr val="9C95A3"/>
                 </a:solidFill>
-                <a:latin typeface="Karla"/>
+                <a:latin typeface="Calibri"/>
               </a:rPr>
               <a:t>The Pastoral Guide</a:t>
             </a:r>
@@ -14818,7 +14026,7 @@
                 <a:solidFill>
                   <a:srgbClr val="9C95A3"/>
                 </a:solidFill>
-                <a:latin typeface="Karla"/>
+                <a:latin typeface="Calibri"/>
               </a:rPr>
               <a:t>22 / 22</a:t>
             </a:r>
@@ -14922,97 +14130,9 @@
                 <a:solidFill>
                   <a:srgbClr val="D8BCE4"/>
                 </a:solidFill>
-                <a:latin typeface="Karla"/>
+                <a:latin typeface="Calibri"/>
               </a:rPr>
               <a:t>ON YOUR TABLE, RIGHT NOW</a:t>
-            </a:r>
-          </a:p>
-        </p:txBody>
-      </p:sp>
-      <p:sp>
-        <p:nvSpPr>
-          <p:cNvPr id="4" name="Rounded Rectangle 3"/>
-          <p:cNvSpPr/>
-          <p:nvPr/>
-        </p:nvSpPr>
-        <p:spPr>
-          <a:xfrm>
-            <a:off x="6949440" y="530352"/>
-            <a:ext cx="1508760" cy="347472"/>
-          </a:xfrm>
-          <a:prstGeom prst="roundRect">
-            <a:avLst>
-              <a:gd name="adj" fmla="val 50000"/>
-            </a:avLst>
-          </a:prstGeom>
-          <a:solidFill>
-            <a:srgbClr val="FFFDF7"/>
-          </a:solidFill>
-          <a:ln>
-            <a:noFill/>
-          </a:ln>
-          <a:effectLst/>
-        </p:spPr>
-        <p:style>
-          <a:lnRef idx="1">
-            <a:schemeClr val="accent1"/>
-          </a:lnRef>
-          <a:fillRef idx="3">
-            <a:schemeClr val="accent1"/>
-          </a:fillRef>
-          <a:effectRef idx="2">
-            <a:schemeClr val="accent1"/>
-          </a:effectRef>
-          <a:fontRef idx="minor">
-            <a:schemeClr val="lt1"/>
-          </a:fontRef>
-        </p:style>
-        <p:txBody>
-          <a:bodyPr rtlCol="0" anchor="ctr"/>
-          <a:lstStyle/>
-          <a:p>
-            <a:pPr algn="ctr"/>
-          </a:p>
-        </p:txBody>
-      </p:sp>
-      <p:sp>
-        <p:nvSpPr>
-          <p:cNvPr id="5" name="TextBox 4"/>
-          <p:cNvSpPr txBox="1"/>
-          <p:nvPr/>
-        </p:nvSpPr>
-        <p:spPr>
-          <a:xfrm>
-            <a:off x="6949440" y="589788"/>
-            <a:ext cx="1508760" cy="237744"/>
-          </a:xfrm>
-          <a:prstGeom prst="rect">
-            <a:avLst/>
-          </a:prstGeom>
-          <a:noFill/>
-        </p:spPr>
-        <p:txBody>
-          <a:bodyPr wrap="square" lIns="0" rIns="0" tIns="0" bIns="0" anchor="t">
-            <a:spAutoFit/>
-          </a:bodyPr>
-          <a:lstStyle/>
-          <a:p>
-            <a:pPr algn="ctr">
-              <a:lnSpc>
-                <a:spcPct val="125000"/>
-              </a:lnSpc>
-              <a:spcAft>
-                <a:spcPts val="0"/>
-              </a:spcAft>
-            </a:pPr>
-            <a:r>
-              <a:rPr sz="1000" b="1" i="0" spc="100">
-                <a:solidFill>
-                  <a:srgbClr val="502961"/>
-                </a:solidFill>
-                <a:latin typeface="Karla"/>
-              </a:rPr>
-              <a:t>RANK THEM</a:t>
             </a:r>
           </a:p>
         </p:txBody>
@@ -15048,11 +14168,11 @@
               </a:spcAft>
             </a:pPr>
             <a:r>
-              <a:rPr sz="2900" b="1" i="0">
+              <a:rPr sz="2900" b="0" i="0">
                 <a:solidFill>
                   <a:srgbClr val="FFFDF7"/>
                 </a:solidFill>
-                <a:latin typeface="Libre Caslon Display"/>
+                <a:latin typeface="Georgia"/>
               </a:rPr>
               <a:t>Which one wakes you up the most?</a:t>
             </a:r>
@@ -15138,11 +14258,11 @@
               </a:spcAft>
             </a:pPr>
             <a:r>
-              <a:rPr sz="1250" b="1" i="0">
+              <a:rPr sz="1250" b="0" i="0">
                 <a:solidFill>
                   <a:srgbClr val="502961"/>
                 </a:solidFill>
-                <a:latin typeface="Libre Caslon Display"/>
+                <a:latin typeface="Georgia"/>
               </a:rPr>
               <a:t>Lying down</a:t>
             </a:r>
@@ -15228,11 +14348,11 @@
               </a:spcAft>
             </a:pPr>
             <a:r>
-              <a:rPr sz="1250" b="1" i="0">
+              <a:rPr sz="1250" b="0" i="0">
                 <a:solidFill>
                   <a:srgbClr val="502961"/>
                 </a:solidFill>
-                <a:latin typeface="Libre Caslon Display"/>
+                <a:latin typeface="Georgia"/>
               </a:rPr>
               <a:t>A walk outside</a:t>
             </a:r>
@@ -15318,11 +14438,11 @@
               </a:spcAft>
             </a:pPr>
             <a:r>
-              <a:rPr sz="1250" b="1" i="0">
+              <a:rPr sz="1250" b="0" i="0">
                 <a:solidFill>
                   <a:srgbClr val="502961"/>
                 </a:solidFill>
-                <a:latin typeface="Libre Caslon Display"/>
+                <a:latin typeface="Georgia"/>
               </a:rPr>
               <a:t>Talking to somebody</a:t>
             </a:r>
@@ -15408,11 +14528,11 @@
               </a:spcAft>
             </a:pPr>
             <a:r>
-              <a:rPr sz="1250" b="1" i="0">
+              <a:rPr sz="1250" b="0" i="0">
                 <a:solidFill>
                   <a:srgbClr val="502961"/>
                 </a:solidFill>
-                <a:latin typeface="Libre Caslon Display"/>
+                <a:latin typeface="Georgia"/>
               </a:rPr>
               <a:t>Five minutes of moving</a:t>
             </a:r>
@@ -15498,11 +14618,11 @@
               </a:spcAft>
             </a:pPr>
             <a:r>
-              <a:rPr sz="1250" b="1" i="0">
+              <a:rPr sz="1250" b="0" i="0">
                 <a:solidFill>
                   <a:srgbClr val="502961"/>
                 </a:solidFill>
-                <a:latin typeface="Libre Caslon Display"/>
+                <a:latin typeface="Georgia"/>
               </a:rPr>
               <a:t>Something sugary</a:t>
             </a:r>
@@ -15588,11 +14708,11 @@
               </a:spcAft>
             </a:pPr>
             <a:r>
-              <a:rPr sz="1250" b="1" i="0">
+              <a:rPr sz="1250" b="0" i="0">
                 <a:solidFill>
                   <a:srgbClr val="502961"/>
                 </a:solidFill>
-                <a:latin typeface="Libre Caslon Display"/>
+                <a:latin typeface="Georgia"/>
               </a:rPr>
               <a:t>Sitting still</a:t>
             </a:r>
@@ -15634,7 +14754,7 @@
                 <a:solidFill>
                   <a:srgbClr val="D8BCE4"/>
                 </a:solidFill>
-                <a:latin typeface="Karla"/>
+                <a:latin typeface="Calibri"/>
               </a:rPr>
               <a:t>In pairs. Best at the top. Imagine you have ten minutes and want to feel awake at the end.</a:t>
             </a:r>
@@ -15700,7 +14820,7 @@
                 <a:solidFill>
                   <a:srgbClr val="D8BCE4"/>
                 </a:solidFill>
-                <a:latin typeface="Karla"/>
+                <a:latin typeface="Calibri"/>
               </a:rPr>
               <a:t>The Pastoral Guide</a:t>
             </a:r>
@@ -15742,7 +14862,7 @@
                 <a:solidFill>
                   <a:srgbClr val="D8BCE4"/>
                 </a:solidFill>
-                <a:latin typeface="Karla"/>
+                <a:latin typeface="Calibri"/>
               </a:rPr>
               <a:t>3 / 22</a:t>
             </a:r>
@@ -15846,97 +14966,9 @@
                 <a:solidFill>
                   <a:srgbClr val="502961"/>
                 </a:solidFill>
-                <a:latin typeface="Karla"/>
+                <a:latin typeface="Calibri"/>
               </a:rPr>
               <a:t>BEFORE ANYBODY IS TOLD ANYTHING</a:t>
-            </a:r>
-          </a:p>
-        </p:txBody>
-      </p:sp>
-      <p:sp>
-        <p:nvSpPr>
-          <p:cNvPr id="4" name="Rounded Rectangle 3"/>
-          <p:cNvSpPr/>
-          <p:nvPr/>
-        </p:nvSpPr>
-        <p:spPr>
-          <a:xfrm>
-            <a:off x="7086600" y="530352"/>
-            <a:ext cx="1371600" cy="347472"/>
-          </a:xfrm>
-          <a:prstGeom prst="roundRect">
-            <a:avLst>
-              <a:gd name="adj" fmla="val 50000"/>
-            </a:avLst>
-          </a:prstGeom>
-          <a:solidFill>
-            <a:srgbClr val="F0E4F5"/>
-          </a:solidFill>
-          <a:ln>
-            <a:noFill/>
-          </a:ln>
-          <a:effectLst/>
-        </p:spPr>
-        <p:style>
-          <a:lnRef idx="1">
-            <a:schemeClr val="accent1"/>
-          </a:lnRef>
-          <a:fillRef idx="3">
-            <a:schemeClr val="accent1"/>
-          </a:fillRef>
-          <a:effectRef idx="2">
-            <a:schemeClr val="accent1"/>
-          </a:effectRef>
-          <a:fontRef idx="minor">
-            <a:schemeClr val="lt1"/>
-          </a:fontRef>
-        </p:style>
-        <p:txBody>
-          <a:bodyPr rtlCol="0" anchor="ctr"/>
-          <a:lstStyle/>
-          <a:p>
-            <a:pPr algn="ctr"/>
-          </a:p>
-        </p:txBody>
-      </p:sp>
-      <p:sp>
-        <p:nvSpPr>
-          <p:cNvPr id="5" name="TextBox 4"/>
-          <p:cNvSpPr txBox="1"/>
-          <p:nvPr/>
-        </p:nvSpPr>
-        <p:spPr>
-          <a:xfrm>
-            <a:off x="7086600" y="589788"/>
-            <a:ext cx="1371600" cy="237744"/>
-          </a:xfrm>
-          <a:prstGeom prst="rect">
-            <a:avLst/>
-          </a:prstGeom>
-          <a:noFill/>
-        </p:spPr>
-        <p:txBody>
-          <a:bodyPr wrap="square" lIns="0" rIns="0" tIns="0" bIns="0" anchor="t">
-            <a:spAutoFit/>
-          </a:bodyPr>
-          <a:lstStyle/>
-          <a:p>
-            <a:pPr algn="ctr">
-              <a:lnSpc>
-                <a:spcPct val="125000"/>
-              </a:lnSpc>
-              <a:spcAft>
-                <a:spcPts val="0"/>
-              </a:spcAft>
-            </a:pPr>
-            <a:r>
-              <a:rPr sz="1000" b="1" i="0" spc="100">
-                <a:solidFill>
-                  <a:srgbClr val="502961"/>
-                </a:solidFill>
-                <a:latin typeface="Karla"/>
-              </a:rPr>
-              <a:t>ARGUE</a:t>
             </a:r>
           </a:p>
         </p:txBody>
@@ -15972,11 +15004,11 @@
               </a:spcAft>
             </a:pPr>
             <a:r>
-              <a:rPr sz="3100" b="1" i="0">
+              <a:rPr sz="3100" b="0" i="0">
                 <a:solidFill>
                   <a:srgbClr val="2F2A36"/>
                 </a:solidFill>
-                <a:latin typeface="Libre Caslon Display"/>
+                <a:latin typeface="Georgia"/>
               </a:rPr>
               <a:t>Who put what at the top?</a:t>
             </a:r>
@@ -16018,7 +15050,7 @@
                 <a:solidFill>
                   <a:srgbClr val="635C6B"/>
                 </a:solidFill>
-                <a:latin typeface="Karla"/>
+                <a:latin typeface="Calibri"/>
               </a:rPr>
               <a:t>Two pairs who disagree. Both explain. Do not settle it yet.</a:t>
             </a:r>
@@ -16104,21 +15136,21 @@
               </a:spcAft>
             </a:pPr>
             <a:r>
-              <a:rPr sz="1700" b="1" i="0">
+              <a:rPr sz="1700" b="0" i="0">
                 <a:solidFill>
                   <a:srgbClr val="502961"/>
                 </a:solidFill>
-                <a:latin typeface="Libre Caslon Display"/>
+                <a:latin typeface="Georgia"/>
               </a:rPr>
               <a:t>Lying down for ten minutes and moving for five</a:t>
             </a:r>
             <a:br/>
             <a:r>
-              <a:rPr sz="1700" b="1" i="0">
+              <a:rPr sz="1700" b="0" i="0">
                 <a:solidFill>
                   <a:srgbClr val="502961"/>
                 </a:solidFill>
-                <a:latin typeface="Libre Caslon Display"/>
+                <a:latin typeface="Georgia"/>
               </a:rPr>
               <a:t>leave you feeling very different by lunch.</a:t>
             </a:r>
@@ -16160,7 +15192,7 @@
                 <a:solidFill>
                   <a:srgbClr val="502961"/>
                 </a:solidFill>
-                <a:latin typeface="Karla"/>
+                <a:latin typeface="Calibri"/>
               </a:rPr>
               <a:t>So why does the tiring one leave you with more energy?</a:t>
             </a:r>
@@ -16226,7 +15258,7 @@
                 <a:solidFill>
                   <a:srgbClr val="9C95A3"/>
                 </a:solidFill>
-                <a:latin typeface="Karla"/>
+                <a:latin typeface="Calibri"/>
               </a:rPr>
               <a:t>The Pastoral Guide</a:t>
             </a:r>
@@ -16268,7 +15300,7 @@
                 <a:solidFill>
                   <a:srgbClr val="9C95A3"/>
                 </a:solidFill>
-                <a:latin typeface="Karla"/>
+                <a:latin typeface="Calibri"/>
               </a:rPr>
               <a:t>4 / 22</a:t>
             </a:r>
@@ -16372,97 +15404,9 @@
                 <a:solidFill>
                   <a:srgbClr val="D8BCE4"/>
                 </a:solidFill>
-                <a:latin typeface="Karla"/>
+                <a:latin typeface="Calibri"/>
               </a:rPr>
               <a:t>WHAT IS ACTUALLY HAPPENING</a:t>
-            </a:r>
-          </a:p>
-        </p:txBody>
-      </p:sp>
-      <p:sp>
-        <p:nvSpPr>
-          <p:cNvPr id="4" name="Rounded Rectangle 3"/>
-          <p:cNvSpPr/>
-          <p:nvPr/>
-        </p:nvSpPr>
-        <p:spPr>
-          <a:xfrm>
-            <a:off x="7086600" y="530352"/>
-            <a:ext cx="1371600" cy="347472"/>
-          </a:xfrm>
-          <a:prstGeom prst="roundRect">
-            <a:avLst>
-              <a:gd name="adj" fmla="val 50000"/>
-            </a:avLst>
-          </a:prstGeom>
-          <a:solidFill>
-            <a:srgbClr val="FFFDF7"/>
-          </a:solidFill>
-          <a:ln>
-            <a:noFill/>
-          </a:ln>
-          <a:effectLst/>
-        </p:spPr>
-        <p:style>
-          <a:lnRef idx="1">
-            <a:schemeClr val="accent1"/>
-          </a:lnRef>
-          <a:fillRef idx="3">
-            <a:schemeClr val="accent1"/>
-          </a:fillRef>
-          <a:effectRef idx="2">
-            <a:schemeClr val="accent1"/>
-          </a:effectRef>
-          <a:fontRef idx="minor">
-            <a:schemeClr val="lt1"/>
-          </a:fontRef>
-        </p:style>
-        <p:txBody>
-          <a:bodyPr rtlCol="0" anchor="ctr"/>
-          <a:lstStyle/>
-          <a:p>
-            <a:pPr algn="ctr"/>
-          </a:p>
-        </p:txBody>
-      </p:sp>
-      <p:sp>
-        <p:nvSpPr>
-          <p:cNvPr id="5" name="TextBox 4"/>
-          <p:cNvSpPr txBox="1"/>
-          <p:nvPr/>
-        </p:nvSpPr>
-        <p:spPr>
-          <a:xfrm>
-            <a:off x="7086600" y="589788"/>
-            <a:ext cx="1371600" cy="237744"/>
-          </a:xfrm>
-          <a:prstGeom prst="rect">
-            <a:avLst/>
-          </a:prstGeom>
-          <a:noFill/>
-        </p:spPr>
-        <p:txBody>
-          <a:bodyPr wrap="square" lIns="0" rIns="0" tIns="0" bIns="0" anchor="t">
-            <a:spAutoFit/>
-          </a:bodyPr>
-          <a:lstStyle/>
-          <a:p>
-            <a:pPr algn="ctr">
-              <a:lnSpc>
-                <a:spcPct val="125000"/>
-              </a:lnSpc>
-              <a:spcAft>
-                <a:spcPts val="0"/>
-              </a:spcAft>
-            </a:pPr>
-            <a:r>
-              <a:rPr sz="1000" b="1" i="0" spc="100">
-                <a:solidFill>
-                  <a:srgbClr val="502961"/>
-                </a:solidFill>
-                <a:latin typeface="Karla"/>
-              </a:rPr>
-              <a:t>LEARN</a:t>
             </a:r>
           </a:p>
         </p:txBody>
@@ -16498,21 +15442,21 @@
               </a:spcAft>
             </a:pPr>
             <a:r>
-              <a:rPr sz="2800" b="1" i="0">
+              <a:rPr sz="2800" b="0" i="0">
                 <a:solidFill>
                   <a:srgbClr val="FFFDF7"/>
                 </a:solidFill>
-                <a:latin typeface="Libre Caslon Display"/>
+                <a:latin typeface="Georgia"/>
               </a:rPr>
               <a:t>It changes your mood and your focus,</a:t>
             </a:r>
             <a:br/>
             <a:r>
-              <a:rPr sz="2800" b="1" i="0">
+              <a:rPr sz="2800" b="0" i="0">
                 <a:solidFill>
                   <a:srgbClr val="FFFDF7"/>
                 </a:solidFill>
-                <a:latin typeface="Libre Caslon Display"/>
+                <a:latin typeface="Georgia"/>
               </a:rPr>
               <a:t>and it does it in minutes.</a:t>
             </a:r>
@@ -16598,7 +15542,7 @@
                 <a:solidFill>
                   <a:srgbClr val="D8BCE4"/>
                 </a:solidFill>
-                <a:latin typeface="Karla"/>
+                <a:latin typeface="Calibri"/>
               </a:rPr>
               <a:t>Your heart rate rises, more blood reaches your brain, and your body releases</a:t>
             </a:r>
@@ -16608,7 +15552,7 @@
                 <a:solidFill>
                   <a:srgbClr val="D8BCE4"/>
                 </a:solidFill>
-                <a:latin typeface="Karla"/>
+                <a:latin typeface="Calibri"/>
               </a:rPr>
               <a:t>the chemicals attention runs on. That is why it works in minutes, not months.</a:t>
             </a:r>
@@ -16674,7 +15618,7 @@
                 <a:solidFill>
                   <a:srgbClr val="D8BCE4"/>
                 </a:solidFill>
-                <a:latin typeface="Karla"/>
+                <a:latin typeface="Calibri"/>
               </a:rPr>
               <a:t>The Pastoral Guide</a:t>
             </a:r>
@@ -16716,7 +15660,7 @@
                 <a:solidFill>
                   <a:srgbClr val="D8BCE4"/>
                 </a:solidFill>
-                <a:latin typeface="Karla"/>
+                <a:latin typeface="Calibri"/>
               </a:rPr>
               <a:t>5 / 22</a:t>
             </a:r>
@@ -16820,97 +15764,9 @@
                 <a:solidFill>
                   <a:srgbClr val="502961"/>
                 </a:solidFill>
-                <a:latin typeface="Karla"/>
+                <a:latin typeface="Calibri"/>
               </a:rPr>
               <a:t>THE WHOLE LESSON IS THIS SHAPE</a:t>
-            </a:r>
-          </a:p>
-        </p:txBody>
-      </p:sp>
-      <p:sp>
-        <p:nvSpPr>
-          <p:cNvPr id="4" name="Rounded Rectangle 3"/>
-          <p:cNvSpPr/>
-          <p:nvPr/>
-        </p:nvSpPr>
-        <p:spPr>
-          <a:xfrm>
-            <a:off x="7086600" y="530352"/>
-            <a:ext cx="1371600" cy="347472"/>
-          </a:xfrm>
-          <a:prstGeom prst="roundRect">
-            <a:avLst>
-              <a:gd name="adj" fmla="val 50000"/>
-            </a:avLst>
-          </a:prstGeom>
-          <a:solidFill>
-            <a:srgbClr val="F0E4F5"/>
-          </a:solidFill>
-          <a:ln>
-            <a:noFill/>
-          </a:ln>
-          <a:effectLst/>
-        </p:spPr>
-        <p:style>
-          <a:lnRef idx="1">
-            <a:schemeClr val="accent1"/>
-          </a:lnRef>
-          <a:fillRef idx="3">
-            <a:schemeClr val="accent1"/>
-          </a:fillRef>
-          <a:effectRef idx="2">
-            <a:schemeClr val="accent1"/>
-          </a:effectRef>
-          <a:fontRef idx="minor">
-            <a:schemeClr val="lt1"/>
-          </a:fontRef>
-        </p:style>
-        <p:txBody>
-          <a:bodyPr rtlCol="0" anchor="ctr"/>
-          <a:lstStyle/>
-          <a:p>
-            <a:pPr algn="ctr"/>
-          </a:p>
-        </p:txBody>
-      </p:sp>
-      <p:sp>
-        <p:nvSpPr>
-          <p:cNvPr id="5" name="TextBox 4"/>
-          <p:cNvSpPr txBox="1"/>
-          <p:nvPr/>
-        </p:nvSpPr>
-        <p:spPr>
-          <a:xfrm>
-            <a:off x="7086600" y="589788"/>
-            <a:ext cx="1371600" cy="237744"/>
-          </a:xfrm>
-          <a:prstGeom prst="rect">
-            <a:avLst/>
-          </a:prstGeom>
-          <a:noFill/>
-        </p:spPr>
-        <p:txBody>
-          <a:bodyPr wrap="square" lIns="0" rIns="0" tIns="0" bIns="0" anchor="t">
-            <a:spAutoFit/>
-          </a:bodyPr>
-          <a:lstStyle/>
-          <a:p>
-            <a:pPr algn="ctr">
-              <a:lnSpc>
-                <a:spcPct val="125000"/>
-              </a:lnSpc>
-              <a:spcAft>
-                <a:spcPts val="0"/>
-              </a:spcAft>
-            </a:pPr>
-            <a:r>
-              <a:rPr sz="1000" b="1" i="0" spc="100">
-                <a:solidFill>
-                  <a:srgbClr val="502961"/>
-                </a:solidFill>
-                <a:latin typeface="Karla"/>
-              </a:rPr>
-              <a:t>LEARN</a:t>
             </a:r>
           </a:p>
         </p:txBody>
@@ -16946,11 +15802,11 @@
               </a:spcAft>
             </a:pPr>
             <a:r>
-              <a:rPr sz="3000" b="1" i="0">
+              <a:rPr sz="3000" b="0" i="0">
                 <a:solidFill>
                   <a:srgbClr val="2F2A36"/>
                 </a:solidFill>
-                <a:latin typeface="Libre Caslon Display"/>
+                <a:latin typeface="Georgia"/>
               </a:rPr>
               <a:t>Two versions of one morning</a:t>
             </a:r>
@@ -17036,11 +15892,11 @@
               </a:spcAft>
             </a:pPr>
             <a:r>
-              <a:rPr sz="1500" b="1" i="0">
+              <a:rPr sz="1500" b="0" i="0">
                 <a:solidFill>
                   <a:srgbClr val="502961"/>
                 </a:solidFill>
-                <a:latin typeface="Libre Caslon Display"/>
+                <a:latin typeface="Georgia"/>
               </a:rPr>
               <a:t>The still one</a:t>
             </a:r>
@@ -17082,7 +15938,7 @@
                 <a:solidFill>
                   <a:srgbClr val="635C6B"/>
                 </a:solidFill>
-                <a:latin typeface="Karla"/>
+                <a:latin typeface="Calibri"/>
               </a:rPr>
               <a:t>Same chair, same position, all morning.</a:t>
             </a:r>
@@ -17124,7 +15980,7 @@
                 <a:solidFill>
                   <a:srgbClr val="2F2A36"/>
                 </a:solidFill>
-                <a:latin typeface="Karla"/>
+                <a:latin typeface="Calibri"/>
               </a:rPr>
               <a:t>Nothing changes, so nothing lifts. Your attention drifts down through the morning and you call it being tired.</a:t>
             </a:r>
@@ -17210,11 +16066,11 @@
               </a:spcAft>
             </a:pPr>
             <a:r>
-              <a:rPr sz="1500" b="1" i="0">
+              <a:rPr sz="1500" b="0" i="0">
                 <a:solidFill>
                   <a:srgbClr val="502961"/>
                 </a:solidFill>
-                <a:latin typeface="Libre Caslon Display"/>
+                <a:latin typeface="Georgia"/>
               </a:rPr>
               <a:t>The five-minute one</a:t>
             </a:r>
@@ -17256,7 +16112,7 @@
                 <a:solidFill>
                   <a:srgbClr val="635C6B"/>
                 </a:solidFill>
-                <a:latin typeface="Karla"/>
+                <a:latin typeface="Calibri"/>
               </a:rPr>
               <a:t>One short burst, somewhere in the middle.</a:t>
             </a:r>
@@ -17298,7 +16154,7 @@
                 <a:solidFill>
                   <a:srgbClr val="2F2A36"/>
                 </a:solidFill>
-                <a:latin typeface="Karla"/>
+                <a:latin typeface="Calibri"/>
               </a:rPr>
               <a:t>Heart rate up, blood flow up, chemistry up. The lift arrives within minutes and fades gradually over an hour or two.</a:t>
             </a:r>
@@ -17340,7 +16196,7 @@
                 <a:solidFill>
                   <a:srgbClr val="502961"/>
                 </a:solidFill>
-                <a:latin typeface="Karla"/>
+                <a:latin typeface="Calibri"/>
               </a:rPr>
               <a:t>Same morning, same person. One difference, and it is five minutes long.</a:t>
             </a:r>
@@ -17406,7 +16262,7 @@
                 <a:solidFill>
                   <a:srgbClr val="9C95A3"/>
                 </a:solidFill>
-                <a:latin typeface="Karla"/>
+                <a:latin typeface="Calibri"/>
               </a:rPr>
               <a:t>The Pastoral Guide</a:t>
             </a:r>
@@ -17448,7 +16304,7 @@
                 <a:solidFill>
                   <a:srgbClr val="9C95A3"/>
                 </a:solidFill>
-                <a:latin typeface="Karla"/>
+                <a:latin typeface="Calibri"/>
               </a:rPr>
               <a:t>6 / 22</a:t>
             </a:r>
@@ -17552,97 +16408,9 @@
                 <a:solidFill>
                   <a:srgbClr val="502961"/>
                 </a:solidFill>
-                <a:latin typeface="Karla"/>
+                <a:latin typeface="Calibri"/>
               </a:rPr>
               <a:t>WATCH ME DO ONE</a:t>
-            </a:r>
-          </a:p>
-        </p:txBody>
-      </p:sp>
-      <p:sp>
-        <p:nvSpPr>
-          <p:cNvPr id="4" name="Rounded Rectangle 3"/>
-          <p:cNvSpPr/>
-          <p:nvPr/>
-        </p:nvSpPr>
-        <p:spPr>
-          <a:xfrm>
-            <a:off x="7086600" y="530352"/>
-            <a:ext cx="1371600" cy="347472"/>
-          </a:xfrm>
-          <a:prstGeom prst="roundRect">
-            <a:avLst>
-              <a:gd name="adj" fmla="val 50000"/>
-            </a:avLst>
-          </a:prstGeom>
-          <a:solidFill>
-            <a:srgbClr val="F0E4F5"/>
-          </a:solidFill>
-          <a:ln>
-            <a:noFill/>
-          </a:ln>
-          <a:effectLst/>
-        </p:spPr>
-        <p:style>
-          <a:lnRef idx="1">
-            <a:schemeClr val="accent1"/>
-          </a:lnRef>
-          <a:fillRef idx="3">
-            <a:schemeClr val="accent1"/>
-          </a:fillRef>
-          <a:effectRef idx="2">
-            <a:schemeClr val="accent1"/>
-          </a:effectRef>
-          <a:fontRef idx="minor">
-            <a:schemeClr val="lt1"/>
-          </a:fontRef>
-        </p:style>
-        <p:txBody>
-          <a:bodyPr rtlCol="0" anchor="ctr"/>
-          <a:lstStyle/>
-          <a:p>
-            <a:pPr algn="ctr"/>
-          </a:p>
-        </p:txBody>
-      </p:sp>
-      <p:sp>
-        <p:nvSpPr>
-          <p:cNvPr id="5" name="TextBox 4"/>
-          <p:cNvSpPr txBox="1"/>
-          <p:nvPr/>
-        </p:nvSpPr>
-        <p:spPr>
-          <a:xfrm>
-            <a:off x="7086600" y="589788"/>
-            <a:ext cx="1371600" cy="237744"/>
-          </a:xfrm>
-          <a:prstGeom prst="rect">
-            <a:avLst/>
-          </a:prstGeom>
-          <a:noFill/>
-        </p:spPr>
-        <p:txBody>
-          <a:bodyPr wrap="square" lIns="0" rIns="0" tIns="0" bIns="0" anchor="t">
-            <a:spAutoFit/>
-          </a:bodyPr>
-          <a:lstStyle/>
-          <a:p>
-            <a:pPr algn="ctr">
-              <a:lnSpc>
-                <a:spcPct val="125000"/>
-              </a:lnSpc>
-              <a:spcAft>
-                <a:spcPts val="0"/>
-              </a:spcAft>
-            </a:pPr>
-            <a:r>
-              <a:rPr sz="1000" b="1" i="0" spc="100">
-                <a:solidFill>
-                  <a:srgbClr val="502961"/>
-                </a:solidFill>
-                <a:latin typeface="Karla"/>
-              </a:rPr>
-              <a:t>MODEL</a:t>
             </a:r>
           </a:p>
         </p:txBody>
@@ -17678,11 +16446,11 @@
               </a:spcAft>
             </a:pPr>
             <a:r>
-              <a:rPr sz="3100" b="1" i="0">
+              <a:rPr sz="3100" b="0" i="0">
                 <a:solidFill>
                   <a:srgbClr val="2F2A36"/>
                 </a:solidFill>
-                <a:latin typeface="Libre Caslon Display"/>
+                <a:latin typeface="Georgia"/>
               </a:rPr>
               <a:t>Trace the still morning</a:t>
             </a:r>
@@ -17812,7 +16580,7 @@
                 <a:solidFill>
                   <a:srgbClr val="635C6B"/>
                 </a:solidFill>
-                <a:latin typeface="Karla"/>
+                <a:latin typeface="Calibri"/>
               </a:rPr>
               <a:t>HOW YOU FEEL</a:t>
             </a:r>
@@ -17854,7 +16622,7 @@
                 <a:solidFill>
                   <a:srgbClr val="635C6B"/>
                 </a:solidFill>
-                <a:latin typeface="Karla"/>
+                <a:latin typeface="Calibri"/>
               </a:rPr>
               <a:t>TIME</a:t>
             </a:r>
@@ -18415,7 +17183,7 @@
                 <a:solidFill>
                   <a:srgbClr val="502961"/>
                 </a:solidFill>
-                <a:latin typeface="Karla"/>
+                <a:latin typeface="Calibri"/>
               </a:rPr>
               <a:t>09:00</a:t>
             </a:r>
@@ -18501,7 +17269,7 @@
                 <a:solidFill>
                   <a:srgbClr val="502961"/>
                 </a:solidFill>
-                <a:latin typeface="Karla"/>
+                <a:latin typeface="Calibri"/>
               </a:rPr>
               <a:t>11:00</a:t>
             </a:r>
@@ -18587,7 +17355,7 @@
                 <a:solidFill>
                   <a:srgbClr val="502961"/>
                 </a:solidFill>
-                <a:latin typeface="Karla"/>
+                <a:latin typeface="Calibri"/>
               </a:rPr>
               <a:t>12:30</a:t>
             </a:r>
@@ -18629,7 +17397,7 @@
                 <a:solidFill>
                   <a:srgbClr val="502961"/>
                 </a:solidFill>
-                <a:latin typeface="Karla"/>
+                <a:latin typeface="Calibri"/>
               </a:rPr>
               <a:t>You call this</a:t>
             </a:r>
@@ -18639,7 +17407,7 @@
                 <a:solidFill>
                   <a:srgbClr val="502961"/>
                 </a:solidFill>
-                <a:latin typeface="Karla"/>
+                <a:latin typeface="Calibri"/>
               </a:rPr>
               <a:t>being tired</a:t>
             </a:r>
@@ -18681,7 +17449,7 @@
                 <a:solidFill>
                   <a:srgbClr val="502961"/>
                 </a:solidFill>
-                <a:latin typeface="Karla"/>
+                <a:latin typeface="Calibri"/>
               </a:rPr>
               <a:t>Nothing has gone wrong here. This is what a morning in a chair looks like.</a:t>
             </a:r>
@@ -18747,7 +17515,7 @@
                 <a:solidFill>
                   <a:srgbClr val="9C95A3"/>
                 </a:solidFill>
-                <a:latin typeface="Karla"/>
+                <a:latin typeface="Calibri"/>
               </a:rPr>
               <a:t>The Pastoral Guide</a:t>
             </a:r>
@@ -18789,7 +17557,7 @@
                 <a:solidFill>
                   <a:srgbClr val="9C95A3"/>
                 </a:solidFill>
-                <a:latin typeface="Karla"/>
+                <a:latin typeface="Calibri"/>
               </a:rPr>
               <a:t>7 / 22</a:t>
             </a:r>
@@ -18893,97 +17661,9 @@
                 <a:solidFill>
                   <a:srgbClr val="502961"/>
                 </a:solidFill>
-                <a:latin typeface="Karla"/>
+                <a:latin typeface="Calibri"/>
               </a:rPr>
               <a:t>NOW THE ROOM DOES ONE</a:t>
-            </a:r>
-          </a:p>
-        </p:txBody>
-      </p:sp>
-      <p:sp>
-        <p:nvSpPr>
-          <p:cNvPr id="4" name="Rounded Rectangle 3"/>
-          <p:cNvSpPr/>
-          <p:nvPr/>
-        </p:nvSpPr>
-        <p:spPr>
-          <a:xfrm>
-            <a:off x="7050024" y="530352"/>
-            <a:ext cx="1408176" cy="347472"/>
-          </a:xfrm>
-          <a:prstGeom prst="roundRect">
-            <a:avLst>
-              <a:gd name="adj" fmla="val 50000"/>
-            </a:avLst>
-          </a:prstGeom>
-          <a:solidFill>
-            <a:srgbClr val="F0E4F5"/>
-          </a:solidFill>
-          <a:ln>
-            <a:noFill/>
-          </a:ln>
-          <a:effectLst/>
-        </p:spPr>
-        <p:style>
-          <a:lnRef idx="1">
-            <a:schemeClr val="accent1"/>
-          </a:lnRef>
-          <a:fillRef idx="3">
-            <a:schemeClr val="accent1"/>
-          </a:fillRef>
-          <a:effectRef idx="2">
-            <a:schemeClr val="accent1"/>
-          </a:effectRef>
-          <a:fontRef idx="minor">
-            <a:schemeClr val="lt1"/>
-          </a:fontRef>
-        </p:style>
-        <p:txBody>
-          <a:bodyPr rtlCol="0" anchor="ctr"/>
-          <a:lstStyle/>
-          <a:p>
-            <a:pPr algn="ctr"/>
-          </a:p>
-        </p:txBody>
-      </p:sp>
-      <p:sp>
-        <p:nvSpPr>
-          <p:cNvPr id="5" name="TextBox 4"/>
-          <p:cNvSpPr txBox="1"/>
-          <p:nvPr/>
-        </p:nvSpPr>
-        <p:spPr>
-          <a:xfrm>
-            <a:off x="7050024" y="589788"/>
-            <a:ext cx="1408176" cy="237744"/>
-          </a:xfrm>
-          <a:prstGeom prst="rect">
-            <a:avLst/>
-          </a:prstGeom>
-          <a:noFill/>
-        </p:spPr>
-        <p:txBody>
-          <a:bodyPr wrap="square" lIns="0" rIns="0" tIns="0" bIns="0" anchor="t">
-            <a:spAutoFit/>
-          </a:bodyPr>
-          <a:lstStyle/>
-          <a:p>
-            <a:pPr algn="ctr">
-              <a:lnSpc>
-                <a:spcPct val="125000"/>
-              </a:lnSpc>
-              <a:spcAft>
-                <a:spcPts val="0"/>
-              </a:spcAft>
-            </a:pPr>
-            <a:r>
-              <a:rPr sz="1000" b="1" i="0" spc="100">
-                <a:solidFill>
-                  <a:srgbClr val="502961"/>
-                </a:solidFill>
-                <a:latin typeface="Karla"/>
-              </a:rPr>
-              <a:t>TOGETHER</a:t>
             </a:r>
           </a:p>
         </p:txBody>
@@ -19019,11 +17699,11 @@
               </a:spcAft>
             </a:pPr>
             <a:r>
-              <a:rPr sz="3200" b="1" i="0">
+              <a:rPr sz="3200" b="0" i="0">
                 <a:solidFill>
                   <a:srgbClr val="2F2A36"/>
                 </a:solidFill>
-                <a:latin typeface="Libre Caslon Display"/>
+                <a:latin typeface="Georgia"/>
               </a:rPr>
               <a:t>Draw the other line</a:t>
             </a:r>
@@ -19065,7 +17745,7 @@
                 <a:solidFill>
                   <a:srgbClr val="635C6B"/>
                 </a:solidFill>
-                <a:latin typeface="Karla"/>
+                <a:latin typeface="Calibri"/>
               </a:rPr>
               <a:t>Five minutes of moving, at eleven o’clock. Where does the line go?</a:t>
             </a:r>
@@ -19195,11 +17875,11 @@
               </a:spcAft>
             </a:pPr>
             <a:r>
-              <a:rPr sz="1400" b="1" i="0">
+              <a:rPr sz="1400" b="0" i="0">
                 <a:solidFill>
                   <a:srgbClr val="FFFDF7"/>
                 </a:solidFill>
-                <a:latin typeface="Libre Caslon Display"/>
+                <a:latin typeface="Georgia"/>
               </a:rPr>
               <a:t>1</a:t>
             </a:r>
@@ -19237,11 +17917,11 @@
               </a:spcAft>
             </a:pPr>
             <a:r>
-              <a:rPr sz="1500" b="1" i="0">
+              <a:rPr sz="1500" b="0" i="0">
                 <a:solidFill>
                   <a:srgbClr val="502961"/>
                 </a:solidFill>
-                <a:latin typeface="Libre Caslon Display"/>
+                <a:latin typeface="Georgia"/>
               </a:rPr>
               <a:t>How fast does it go up?</a:t>
             </a:r>
@@ -19283,7 +17963,7 @@
                 <a:solidFill>
                   <a:srgbClr val="635C6B"/>
                 </a:solidFill>
-                <a:latin typeface="Karla"/>
+                <a:latin typeface="Calibri"/>
               </a:rPr>
               <a:t>Minutes, hours, or the next day? Say which.</a:t>
             </a:r>
@@ -19413,11 +18093,11 @@
               </a:spcAft>
             </a:pPr>
             <a:r>
-              <a:rPr sz="1400" b="1" i="0">
+              <a:rPr sz="1400" b="0" i="0">
                 <a:solidFill>
                   <a:srgbClr val="FFFDF7"/>
                 </a:solidFill>
-                <a:latin typeface="Libre Caslon Display"/>
+                <a:latin typeface="Georgia"/>
               </a:rPr>
               <a:t>2</a:t>
             </a:r>
@@ -19455,11 +18135,11 @@
               </a:spcAft>
             </a:pPr>
             <a:r>
-              <a:rPr sz="1500" b="1" i="0">
+              <a:rPr sz="1500" b="0" i="0">
                 <a:solidFill>
                   <a:srgbClr val="502961"/>
                 </a:solidFill>
-                <a:latin typeface="Libre Caslon Display"/>
+                <a:latin typeface="Georgia"/>
               </a:rPr>
               <a:t>How long does it stay up?</a:t>
             </a:r>
@@ -19501,7 +18181,7 @@
                 <a:solidFill>
                   <a:srgbClr val="635C6B"/>
                 </a:solidFill>
-                <a:latin typeface="Karla"/>
+                <a:latin typeface="Calibri"/>
               </a:rPr>
               <a:t>And does it drop back below where it started?</a:t>
             </a:r>
@@ -19543,7 +18223,7 @@
                 <a:solidFill>
                   <a:srgbClr val="502961"/>
                 </a:solidFill>
-                <a:latin typeface="Karla"/>
+                <a:latin typeface="Calibri"/>
               </a:rPr>
               <a:t>Guess out loud before the next slide. You are going to measure this yourselves.</a:t>
             </a:r>
@@ -19609,7 +18289,7 @@
                 <a:solidFill>
                   <a:srgbClr val="9C95A3"/>
                 </a:solidFill>
-                <a:latin typeface="Karla"/>
+                <a:latin typeface="Calibri"/>
               </a:rPr>
               <a:t>The Pastoral Guide</a:t>
             </a:r>
@@ -19651,7 +18331,7 @@
                 <a:solidFill>
                   <a:srgbClr val="9C95A3"/>
                 </a:solidFill>
-                <a:latin typeface="Karla"/>
+                <a:latin typeface="Calibri"/>
               </a:rPr>
               <a:t>8 / 22</a:t>
             </a:r>
@@ -19755,97 +18435,9 @@
                 <a:solidFill>
                   <a:srgbClr val="502961"/>
                 </a:solidFill>
-                <a:latin typeface="Karla"/>
+                <a:latin typeface="Calibri"/>
               </a:rPr>
               <a:t>WHAT IT ACTUALLY LOOKS LIKE</a:t>
-            </a:r>
-          </a:p>
-        </p:txBody>
-      </p:sp>
-      <p:sp>
-        <p:nvSpPr>
-          <p:cNvPr id="4" name="Rounded Rectangle 3"/>
-          <p:cNvSpPr/>
-          <p:nvPr/>
-        </p:nvSpPr>
-        <p:spPr>
-          <a:xfrm>
-            <a:off x="7086600" y="530352"/>
-            <a:ext cx="1371600" cy="347472"/>
-          </a:xfrm>
-          <a:prstGeom prst="roundRect">
-            <a:avLst>
-              <a:gd name="adj" fmla="val 50000"/>
-            </a:avLst>
-          </a:prstGeom>
-          <a:solidFill>
-            <a:srgbClr val="F0E4F5"/>
-          </a:solidFill>
-          <a:ln>
-            <a:noFill/>
-          </a:ln>
-          <a:effectLst/>
-        </p:spPr>
-        <p:style>
-          <a:lnRef idx="1">
-            <a:schemeClr val="accent1"/>
-          </a:lnRef>
-          <a:fillRef idx="3">
-            <a:schemeClr val="accent1"/>
-          </a:fillRef>
-          <a:effectRef idx="2">
-            <a:schemeClr val="accent1"/>
-          </a:effectRef>
-          <a:fontRef idx="minor">
-            <a:schemeClr val="lt1"/>
-          </a:fontRef>
-        </p:style>
-        <p:txBody>
-          <a:bodyPr rtlCol="0" anchor="ctr"/>
-          <a:lstStyle/>
-          <a:p>
-            <a:pPr algn="ctr"/>
-          </a:p>
-        </p:txBody>
-      </p:sp>
-      <p:sp>
-        <p:nvSpPr>
-          <p:cNvPr id="5" name="TextBox 4"/>
-          <p:cNvSpPr txBox="1"/>
-          <p:nvPr/>
-        </p:nvSpPr>
-        <p:spPr>
-          <a:xfrm>
-            <a:off x="7086600" y="589788"/>
-            <a:ext cx="1371600" cy="237744"/>
-          </a:xfrm>
-          <a:prstGeom prst="rect">
-            <a:avLst/>
-          </a:prstGeom>
-          <a:noFill/>
-        </p:spPr>
-        <p:txBody>
-          <a:bodyPr wrap="square" lIns="0" rIns="0" tIns="0" bIns="0" anchor="t">
-            <a:spAutoFit/>
-          </a:bodyPr>
-          <a:lstStyle/>
-          <a:p>
-            <a:pPr algn="ctr">
-              <a:lnSpc>
-                <a:spcPct val="125000"/>
-              </a:lnSpc>
-              <a:spcAft>
-                <a:spcPts val="0"/>
-              </a:spcAft>
-            </a:pPr>
-            <a:r>
-              <a:rPr sz="1000" b="1" i="0" spc="100">
-                <a:solidFill>
-                  <a:srgbClr val="502961"/>
-                </a:solidFill>
-                <a:latin typeface="Karla"/>
-              </a:rPr>
-              <a:t>LEARN</a:t>
             </a:r>
           </a:p>
         </p:txBody>
@@ -19881,11 +18473,11 @@
               </a:spcAft>
             </a:pPr>
             <a:r>
-              <a:rPr sz="3100" b="1" i="0">
+              <a:rPr sz="3100" b="0" i="0">
                 <a:solidFill>
                   <a:srgbClr val="2F2A36"/>
                 </a:solidFill>
-                <a:latin typeface="Libre Caslon Display"/>
+                <a:latin typeface="Georgia"/>
               </a:rPr>
               <a:t>Minutes up, hours down</a:t>
             </a:r>
@@ -20015,7 +18607,7 @@
                 <a:solidFill>
                   <a:srgbClr val="635C6B"/>
                 </a:solidFill>
-                <a:latin typeface="Karla"/>
+                <a:latin typeface="Calibri"/>
               </a:rPr>
               <a:t>HOW YOU FEEL</a:t>
             </a:r>
@@ -20057,7 +18649,7 @@
                 <a:solidFill>
                   <a:srgbClr val="635C6B"/>
                 </a:solidFill>
-                <a:latin typeface="Karla"/>
+                <a:latin typeface="Calibri"/>
               </a:rPr>
               <a:t>TIME</a:t>
             </a:r>
@@ -21094,7 +19686,7 @@
                 <a:solidFill>
                   <a:srgbClr val="502961"/>
                 </a:solidFill>
-                <a:latin typeface="Karla"/>
+                <a:latin typeface="Calibri"/>
               </a:rPr>
               <a:t>Five minutes,</a:t>
             </a:r>
@@ -21104,7 +19696,7 @@
                 <a:solidFill>
                   <a:srgbClr val="502961"/>
                 </a:solidFill>
-                <a:latin typeface="Karla"/>
+                <a:latin typeface="Calibri"/>
               </a:rPr>
               <a:t>here</a:t>
             </a:r>
@@ -21146,7 +19738,7 @@
                 <a:solidFill>
                   <a:srgbClr val="502961"/>
                 </a:solidFill>
-                <a:latin typeface="Karla"/>
+                <a:latin typeface="Calibri"/>
               </a:rPr>
               <a:t>Still up an hour later</a:t>
             </a:r>
@@ -21188,7 +19780,7 @@
                 <a:solidFill>
                   <a:srgbClr val="9C95A3"/>
                 </a:solidFill>
-                <a:latin typeface="Karla"/>
+                <a:latin typeface="Calibri"/>
               </a:rPr>
               <a:t>The still morning</a:t>
             </a:r>
@@ -21230,7 +19822,7 @@
                 <a:solidFill>
                   <a:srgbClr val="502961"/>
                 </a:solidFill>
-                <a:latin typeface="Karla"/>
+                <a:latin typeface="Calibri"/>
               </a:rPr>
               <a:t>It is not permanent, and it is not meant to be. It gets you through the next hour.</a:t>
             </a:r>
@@ -21296,7 +19888,7 @@
                 <a:solidFill>
                   <a:srgbClr val="9C95A3"/>
                 </a:solidFill>
-                <a:latin typeface="Karla"/>
+                <a:latin typeface="Calibri"/>
               </a:rPr>
               <a:t>The Pastoral Guide</a:t>
             </a:r>
@@ -21338,7 +19930,7 @@
                 <a:solidFill>
                   <a:srgbClr val="9C95A3"/>
                 </a:solidFill>
-                <a:latin typeface="Karla"/>
+                <a:latin typeface="Calibri"/>
               </a:rPr>
               <a:t>9 / 22</a:t>
             </a:r>
